--- a/docs/JARVIS.pptx
+++ b/docs/JARVIS.pptx
@@ -5,22 +5,22 @@
     <p:sldMasterId id="2147483648" r:id="rId1"/>
   </p:sldMasterIdLst>
   <p:sldIdLst>
-    <p:sldId id="256" r:id="rId2"/>
-    <p:sldId id="257" r:id="rId3"/>
-    <p:sldId id="258" r:id="rId4"/>
-    <p:sldId id="259" r:id="rId5"/>
-    <p:sldId id="260" r:id="rId6"/>
-    <p:sldId id="261" r:id="rId7"/>
-    <p:sldId id="262" r:id="rId8"/>
-    <p:sldId id="263" r:id="rId9"/>
-    <p:sldId id="264" r:id="rId10"/>
-    <p:sldId id="265" r:id="rId11"/>
-    <p:sldId id="267" r:id="rId12"/>
-    <p:sldId id="268" r:id="rId13"/>
-    <p:sldId id="269" r:id="rId14"/>
-    <p:sldId id="270" r:id="rId15"/>
+    <p:sldId id="256" r:id="rId7"/>
+    <p:sldId id="257" r:id="rId8"/>
+    <p:sldId id="258" r:id="rId9"/>
+    <p:sldId id="259" r:id="rId10"/>
+    <p:sldId id="260" r:id="rId11"/>
+    <p:sldId id="261" r:id="rId12"/>
+    <p:sldId id="262" r:id="rId13"/>
+    <p:sldId id="263" r:id="rId14"/>
+    <p:sldId id="264" r:id="rId15"/>
+    <p:sldId id="265" r:id="rId16"/>
+    <p:sldId id="266" r:id="rId17"/>
+    <p:sldId id="267" r:id="rId18"/>
+    <p:sldId id="268" r:id="rId19"/>
+    <p:sldId id="269" r:id="rId20"/>
   </p:sldIdLst>
-  <p:sldSz cx="12192000" cy="6858000"/>
+  <p:sldSz cx="12191695" cy="6858000" type="screen4x3"/>
   <p:notesSz cx="6858000" cy="9144000"/>
   <p:defaultTextStyle>
     <a:defPPr>
@@ -117,22 +117,6 @@
       </a:defRPr>
     </a:lvl9pPr>
   </p:defaultTextStyle>
-  <p:extLst>
-    <p:ext uri="{EFAFB233-063F-42B5-8137-9DF3F51BA10A}">
-      <p15:sldGuideLst xmlns:p15="http://schemas.microsoft.com/office/powerpoint/2012/main">
-        <p15:guide id="1" orient="horz" pos="2160">
-          <p15:clr>
-            <a:srgbClr val="A4A3A4"/>
-          </p15:clr>
-        </p15:guide>
-        <p15:guide id="2" pos="2880">
-          <p15:clr>
-            <a:srgbClr val="A4A3A4"/>
-          </p15:clr>
-        </p15:guide>
-      </p15:sldGuideLst>
-    </p:ext>
-  </p:extLst>
 </p:presentation>
 </file>
 
@@ -174,9 +158,10 @@
           <a:lstStyle/>
           <a:p>
             <a:r>
-              <a:rPr lang="en-US"/>
+              <a:rPr lang="en-US" smtClean="0"/>
               <a:t>Click to edit Master title style</a:t>
             </a:r>
+            <a:endParaRPr lang="en-US"/>
           </a:p>
         </p:txBody>
       </p:sp>
@@ -292,9 +277,10 @@
           </a:lstStyle>
           <a:p>
             <a:r>
-              <a:rPr lang="en-US"/>
+              <a:rPr lang="en-US" smtClean="0"/>
               <a:t>Click to edit Master subtitle style</a:t>
             </a:r>
+            <a:endParaRPr lang="en-US"/>
           </a:p>
         </p:txBody>
       </p:sp>
@@ -315,7 +301,7 @@
           <a:p>
             <a:fld id="{5BCAD085-E8A6-8845-BD4E-CB4CCA059FC4}" type="datetimeFigureOut">
               <a:rPr lang="en-US" smtClean="0"/>
-              <a:t>6/6/26</a:t>
+              <a:t>1/27/13</a:t>
             </a:fld>
             <a:endParaRPr lang="en-US"/>
           </a:p>
@@ -409,9 +395,10 @@
           <a:lstStyle/>
           <a:p>
             <a:r>
-              <a:rPr lang="en-US"/>
+              <a:rPr lang="en-US" smtClean="0"/>
               <a:t>Click to edit Master title style</a:t>
             </a:r>
+            <a:endParaRPr lang="en-US"/>
           </a:p>
         </p:txBody>
       </p:sp>
@@ -432,37 +419,38 @@
           <a:p>
             <a:pPr lvl="0"/>
             <a:r>
-              <a:rPr lang="en-US"/>
+              <a:rPr lang="en-US" smtClean="0"/>
               <a:t>Click to edit Master text styles</a:t>
             </a:r>
           </a:p>
           <a:p>
             <a:pPr lvl="1"/>
             <a:r>
-              <a:rPr lang="en-US"/>
+              <a:rPr lang="en-US" smtClean="0"/>
               <a:t>Second level</a:t>
             </a:r>
           </a:p>
           <a:p>
             <a:pPr lvl="2"/>
             <a:r>
-              <a:rPr lang="en-US"/>
+              <a:rPr lang="en-US" smtClean="0"/>
               <a:t>Third level</a:t>
             </a:r>
           </a:p>
           <a:p>
             <a:pPr lvl="3"/>
             <a:r>
-              <a:rPr lang="en-US"/>
+              <a:rPr lang="en-US" smtClean="0"/>
               <a:t>Fourth level</a:t>
             </a:r>
           </a:p>
           <a:p>
             <a:pPr lvl="4"/>
             <a:r>
-              <a:rPr lang="en-US"/>
+              <a:rPr lang="en-US" smtClean="0"/>
               <a:t>Fifth level</a:t>
             </a:r>
+            <a:endParaRPr lang="en-US"/>
           </a:p>
         </p:txBody>
       </p:sp>
@@ -483,7 +471,7 @@
           <a:p>
             <a:fld id="{5BCAD085-E8A6-8845-BD4E-CB4CCA059FC4}" type="datetimeFigureOut">
               <a:rPr lang="en-US" smtClean="0"/>
-              <a:t>6/6/26</a:t>
+              <a:t>1/27/13</a:t>
             </a:fld>
             <a:endParaRPr lang="en-US"/>
           </a:p>
@@ -582,9 +570,10 @@
           <a:lstStyle/>
           <a:p>
             <a:r>
-              <a:rPr lang="en-US"/>
+              <a:rPr lang="en-US" smtClean="0"/>
               <a:t>Click to edit Master title style</a:t>
             </a:r>
+            <a:endParaRPr lang="en-US"/>
           </a:p>
         </p:txBody>
       </p:sp>
@@ -610,37 +599,38 @@
           <a:p>
             <a:pPr lvl="0"/>
             <a:r>
-              <a:rPr lang="en-US"/>
+              <a:rPr lang="en-US" smtClean="0"/>
               <a:t>Click to edit Master text styles</a:t>
             </a:r>
           </a:p>
           <a:p>
             <a:pPr lvl="1"/>
             <a:r>
-              <a:rPr lang="en-US"/>
+              <a:rPr lang="en-US" smtClean="0"/>
               <a:t>Second level</a:t>
             </a:r>
           </a:p>
           <a:p>
             <a:pPr lvl="2"/>
             <a:r>
-              <a:rPr lang="en-US"/>
+              <a:rPr lang="en-US" smtClean="0"/>
               <a:t>Third level</a:t>
             </a:r>
           </a:p>
           <a:p>
             <a:pPr lvl="3"/>
             <a:r>
-              <a:rPr lang="en-US"/>
+              <a:rPr lang="en-US" smtClean="0"/>
               <a:t>Fourth level</a:t>
             </a:r>
           </a:p>
           <a:p>
             <a:pPr lvl="4"/>
             <a:r>
-              <a:rPr lang="en-US"/>
+              <a:rPr lang="en-US" smtClean="0"/>
               <a:t>Fifth level</a:t>
             </a:r>
+            <a:endParaRPr lang="en-US"/>
           </a:p>
         </p:txBody>
       </p:sp>
@@ -661,7 +651,7 @@
           <a:p>
             <a:fld id="{5BCAD085-E8A6-8845-BD4E-CB4CCA059FC4}" type="datetimeFigureOut">
               <a:rPr lang="en-US" smtClean="0"/>
-              <a:t>6/6/26</a:t>
+              <a:t>1/27/13</a:t>
             </a:fld>
             <a:endParaRPr lang="en-US"/>
           </a:p>
@@ -755,9 +745,10 @@
           <a:lstStyle/>
           <a:p>
             <a:r>
-              <a:rPr lang="en-US"/>
+              <a:rPr lang="en-US" smtClean="0"/>
               <a:t>Click to edit Master title style</a:t>
             </a:r>
+            <a:endParaRPr lang="en-US"/>
           </a:p>
         </p:txBody>
       </p:sp>
@@ -778,37 +769,38 @@
           <a:p>
             <a:pPr lvl="0"/>
             <a:r>
-              <a:rPr lang="en-US"/>
+              <a:rPr lang="en-US" smtClean="0"/>
               <a:t>Click to edit Master text styles</a:t>
             </a:r>
           </a:p>
           <a:p>
             <a:pPr lvl="1"/>
             <a:r>
-              <a:rPr lang="en-US"/>
+              <a:rPr lang="en-US" smtClean="0"/>
               <a:t>Second level</a:t>
             </a:r>
           </a:p>
           <a:p>
             <a:pPr lvl="2"/>
             <a:r>
-              <a:rPr lang="en-US"/>
+              <a:rPr lang="en-US" smtClean="0"/>
               <a:t>Third level</a:t>
             </a:r>
           </a:p>
           <a:p>
             <a:pPr lvl="3"/>
             <a:r>
-              <a:rPr lang="en-US"/>
+              <a:rPr lang="en-US" smtClean="0"/>
               <a:t>Fourth level</a:t>
             </a:r>
           </a:p>
           <a:p>
             <a:pPr lvl="4"/>
             <a:r>
-              <a:rPr lang="en-US"/>
+              <a:rPr lang="en-US" smtClean="0"/>
               <a:t>Fifth level</a:t>
             </a:r>
+            <a:endParaRPr lang="en-US"/>
           </a:p>
         </p:txBody>
       </p:sp>
@@ -829,7 +821,7 @@
           <a:p>
             <a:fld id="{5BCAD085-E8A6-8845-BD4E-CB4CCA059FC4}" type="datetimeFigureOut">
               <a:rPr lang="en-US" smtClean="0"/>
-              <a:t>6/6/26</a:t>
+              <a:t>1/27/13</a:t>
             </a:fld>
             <a:endParaRPr lang="en-US"/>
           </a:p>
@@ -932,9 +924,10 @@
           </a:lstStyle>
           <a:p>
             <a:r>
-              <a:rPr lang="en-US"/>
+              <a:rPr lang="en-US" smtClean="0"/>
               <a:t>Click to edit Master title style</a:t>
             </a:r>
+            <a:endParaRPr lang="en-US"/>
           </a:p>
         </p:txBody>
       </p:sp>
@@ -1051,7 +1044,7 @@
           <a:p>
             <a:pPr lvl="0"/>
             <a:r>
-              <a:rPr lang="en-US"/>
+              <a:rPr lang="en-US" smtClean="0"/>
               <a:t>Click to edit Master text styles</a:t>
             </a:r>
           </a:p>
@@ -1074,7 +1067,7 @@
           <a:p>
             <a:fld id="{5BCAD085-E8A6-8845-BD4E-CB4CCA059FC4}" type="datetimeFigureOut">
               <a:rPr lang="en-US" smtClean="0"/>
-              <a:t>6/6/26</a:t>
+              <a:t>1/27/13</a:t>
             </a:fld>
             <a:endParaRPr lang="en-US"/>
           </a:p>
@@ -1168,9 +1161,10 @@
           <a:lstStyle/>
           <a:p>
             <a:r>
-              <a:rPr lang="en-US"/>
+              <a:rPr lang="en-US" smtClean="0"/>
               <a:t>Click to edit Master title style</a:t>
             </a:r>
+            <a:endParaRPr lang="en-US"/>
           </a:p>
         </p:txBody>
       </p:sp>
@@ -1224,37 +1218,38 @@
           <a:p>
             <a:pPr lvl="0"/>
             <a:r>
-              <a:rPr lang="en-US"/>
+              <a:rPr lang="en-US" smtClean="0"/>
               <a:t>Click to edit Master text styles</a:t>
             </a:r>
           </a:p>
           <a:p>
             <a:pPr lvl="1"/>
             <a:r>
-              <a:rPr lang="en-US"/>
+              <a:rPr lang="en-US" smtClean="0"/>
               <a:t>Second level</a:t>
             </a:r>
           </a:p>
           <a:p>
             <a:pPr lvl="2"/>
             <a:r>
-              <a:rPr lang="en-US"/>
+              <a:rPr lang="en-US" smtClean="0"/>
               <a:t>Third level</a:t>
             </a:r>
           </a:p>
           <a:p>
             <a:pPr lvl="3"/>
             <a:r>
-              <a:rPr lang="en-US"/>
+              <a:rPr lang="en-US" smtClean="0"/>
               <a:t>Fourth level</a:t>
             </a:r>
           </a:p>
           <a:p>
             <a:pPr lvl="4"/>
             <a:r>
-              <a:rPr lang="en-US"/>
+              <a:rPr lang="en-US" smtClean="0"/>
               <a:t>Fifth level</a:t>
             </a:r>
+            <a:endParaRPr lang="en-US"/>
           </a:p>
         </p:txBody>
       </p:sp>
@@ -1308,37 +1303,38 @@
           <a:p>
             <a:pPr lvl="0"/>
             <a:r>
-              <a:rPr lang="en-US"/>
+              <a:rPr lang="en-US" smtClean="0"/>
               <a:t>Click to edit Master text styles</a:t>
             </a:r>
           </a:p>
           <a:p>
             <a:pPr lvl="1"/>
             <a:r>
-              <a:rPr lang="en-US"/>
+              <a:rPr lang="en-US" smtClean="0"/>
               <a:t>Second level</a:t>
             </a:r>
           </a:p>
           <a:p>
             <a:pPr lvl="2"/>
             <a:r>
-              <a:rPr lang="en-US"/>
+              <a:rPr lang="en-US" smtClean="0"/>
               <a:t>Third level</a:t>
             </a:r>
           </a:p>
           <a:p>
             <a:pPr lvl="3"/>
             <a:r>
-              <a:rPr lang="en-US"/>
+              <a:rPr lang="en-US" smtClean="0"/>
               <a:t>Fourth level</a:t>
             </a:r>
           </a:p>
           <a:p>
             <a:pPr lvl="4"/>
             <a:r>
-              <a:rPr lang="en-US"/>
+              <a:rPr lang="en-US" smtClean="0"/>
               <a:t>Fifth level</a:t>
             </a:r>
+            <a:endParaRPr lang="en-US"/>
           </a:p>
         </p:txBody>
       </p:sp>
@@ -1359,7 +1355,7 @@
           <a:p>
             <a:fld id="{5BCAD085-E8A6-8845-BD4E-CB4CCA059FC4}" type="datetimeFigureOut">
               <a:rPr lang="en-US" smtClean="0"/>
-              <a:t>6/6/26</a:t>
+              <a:t>1/27/13</a:t>
             </a:fld>
             <a:endParaRPr lang="en-US"/>
           </a:p>
@@ -1457,9 +1453,10 @@
           </a:lstStyle>
           <a:p>
             <a:r>
-              <a:rPr lang="en-US"/>
+              <a:rPr lang="en-US" smtClean="0"/>
               <a:t>Click to edit Master title style</a:t>
             </a:r>
+            <a:endParaRPr lang="en-US"/>
           </a:p>
         </p:txBody>
       </p:sp>
@@ -1522,7 +1519,7 @@
           <a:p>
             <a:pPr lvl="0"/>
             <a:r>
-              <a:rPr lang="en-US"/>
+              <a:rPr lang="en-US" smtClean="0"/>
               <a:t>Click to edit Master text styles</a:t>
             </a:r>
           </a:p>
@@ -1578,37 +1575,38 @@
           <a:p>
             <a:pPr lvl="0"/>
             <a:r>
-              <a:rPr lang="en-US"/>
+              <a:rPr lang="en-US" smtClean="0"/>
               <a:t>Click to edit Master text styles</a:t>
             </a:r>
           </a:p>
           <a:p>
             <a:pPr lvl="1"/>
             <a:r>
-              <a:rPr lang="en-US"/>
+              <a:rPr lang="en-US" smtClean="0"/>
               <a:t>Second level</a:t>
             </a:r>
           </a:p>
           <a:p>
             <a:pPr lvl="2"/>
             <a:r>
-              <a:rPr lang="en-US"/>
+              <a:rPr lang="en-US" smtClean="0"/>
               <a:t>Third level</a:t>
             </a:r>
           </a:p>
           <a:p>
             <a:pPr lvl="3"/>
             <a:r>
-              <a:rPr lang="en-US"/>
+              <a:rPr lang="en-US" smtClean="0"/>
               <a:t>Fourth level</a:t>
             </a:r>
           </a:p>
           <a:p>
             <a:pPr lvl="4"/>
             <a:r>
-              <a:rPr lang="en-US"/>
+              <a:rPr lang="en-US" smtClean="0"/>
               <a:t>Fifth level</a:t>
             </a:r>
+            <a:endParaRPr lang="en-US"/>
           </a:p>
         </p:txBody>
       </p:sp>
@@ -1671,7 +1669,7 @@
           <a:p>
             <a:pPr lvl="0"/>
             <a:r>
-              <a:rPr lang="en-US"/>
+              <a:rPr lang="en-US" smtClean="0"/>
               <a:t>Click to edit Master text styles</a:t>
             </a:r>
           </a:p>
@@ -1727,37 +1725,38 @@
           <a:p>
             <a:pPr lvl="0"/>
             <a:r>
-              <a:rPr lang="en-US"/>
+              <a:rPr lang="en-US" smtClean="0"/>
               <a:t>Click to edit Master text styles</a:t>
             </a:r>
           </a:p>
           <a:p>
             <a:pPr lvl="1"/>
             <a:r>
-              <a:rPr lang="en-US"/>
+              <a:rPr lang="en-US" smtClean="0"/>
               <a:t>Second level</a:t>
             </a:r>
           </a:p>
           <a:p>
             <a:pPr lvl="2"/>
             <a:r>
-              <a:rPr lang="en-US"/>
+              <a:rPr lang="en-US" smtClean="0"/>
               <a:t>Third level</a:t>
             </a:r>
           </a:p>
           <a:p>
             <a:pPr lvl="3"/>
             <a:r>
-              <a:rPr lang="en-US"/>
+              <a:rPr lang="en-US" smtClean="0"/>
               <a:t>Fourth level</a:t>
             </a:r>
           </a:p>
           <a:p>
             <a:pPr lvl="4"/>
             <a:r>
-              <a:rPr lang="en-US"/>
+              <a:rPr lang="en-US" smtClean="0"/>
               <a:t>Fifth level</a:t>
             </a:r>
+            <a:endParaRPr lang="en-US"/>
           </a:p>
         </p:txBody>
       </p:sp>
@@ -1778,7 +1777,7 @@
           <a:p>
             <a:fld id="{5BCAD085-E8A6-8845-BD4E-CB4CCA059FC4}" type="datetimeFigureOut">
               <a:rPr lang="en-US" smtClean="0"/>
-              <a:t>6/6/26</a:t>
+              <a:t>1/27/13</a:t>
             </a:fld>
             <a:endParaRPr lang="en-US"/>
           </a:p>
@@ -1872,9 +1871,10 @@
           <a:lstStyle/>
           <a:p>
             <a:r>
-              <a:rPr lang="en-US"/>
+              <a:rPr lang="en-US" smtClean="0"/>
               <a:t>Click to edit Master title style</a:t>
             </a:r>
+            <a:endParaRPr lang="en-US"/>
           </a:p>
         </p:txBody>
       </p:sp>
@@ -1895,7 +1895,7 @@
           <a:p>
             <a:fld id="{5BCAD085-E8A6-8845-BD4E-CB4CCA059FC4}" type="datetimeFigureOut">
               <a:rPr lang="en-US" smtClean="0"/>
-              <a:t>6/6/26</a:t>
+              <a:t>1/27/13</a:t>
             </a:fld>
             <a:endParaRPr lang="en-US"/>
           </a:p>
@@ -1990,7 +1990,7 @@
           <a:p>
             <a:fld id="{5BCAD085-E8A6-8845-BD4E-CB4CCA059FC4}" type="datetimeFigureOut">
               <a:rPr lang="en-US" smtClean="0"/>
-              <a:t>6/6/26</a:t>
+              <a:t>1/27/13</a:t>
             </a:fld>
             <a:endParaRPr lang="en-US"/>
           </a:p>
@@ -2093,9 +2093,10 @@
           </a:lstStyle>
           <a:p>
             <a:r>
-              <a:rPr lang="en-US"/>
+              <a:rPr lang="en-US" smtClean="0"/>
               <a:t>Click to edit Master title style</a:t>
             </a:r>
+            <a:endParaRPr lang="en-US"/>
           </a:p>
         </p:txBody>
       </p:sp>
@@ -2149,37 +2150,38 @@
           <a:p>
             <a:pPr lvl="0"/>
             <a:r>
-              <a:rPr lang="en-US"/>
+              <a:rPr lang="en-US" smtClean="0"/>
               <a:t>Click to edit Master text styles</a:t>
             </a:r>
           </a:p>
           <a:p>
             <a:pPr lvl="1"/>
             <a:r>
-              <a:rPr lang="en-US"/>
+              <a:rPr lang="en-US" smtClean="0"/>
               <a:t>Second level</a:t>
             </a:r>
           </a:p>
           <a:p>
             <a:pPr lvl="2"/>
             <a:r>
-              <a:rPr lang="en-US"/>
+              <a:rPr lang="en-US" smtClean="0"/>
               <a:t>Third level</a:t>
             </a:r>
           </a:p>
           <a:p>
             <a:pPr lvl="3"/>
             <a:r>
-              <a:rPr lang="en-US"/>
+              <a:rPr lang="en-US" smtClean="0"/>
               <a:t>Fourth level</a:t>
             </a:r>
           </a:p>
           <a:p>
             <a:pPr lvl="4"/>
             <a:r>
-              <a:rPr lang="en-US"/>
+              <a:rPr lang="en-US" smtClean="0"/>
               <a:t>Fifth level</a:t>
             </a:r>
+            <a:endParaRPr lang="en-US"/>
           </a:p>
         </p:txBody>
       </p:sp>
@@ -2242,7 +2244,7 @@
           <a:p>
             <a:pPr lvl="0"/>
             <a:r>
-              <a:rPr lang="en-US"/>
+              <a:rPr lang="en-US" smtClean="0"/>
               <a:t>Click to edit Master text styles</a:t>
             </a:r>
           </a:p>
@@ -2265,7 +2267,7 @@
           <a:p>
             <a:fld id="{5BCAD085-E8A6-8845-BD4E-CB4CCA059FC4}" type="datetimeFigureOut">
               <a:rPr lang="en-US" smtClean="0"/>
-              <a:t>6/6/26</a:t>
+              <a:t>1/27/13</a:t>
             </a:fld>
             <a:endParaRPr lang="en-US"/>
           </a:p>
@@ -2368,9 +2370,10 @@
           </a:lstStyle>
           <a:p>
             <a:r>
-              <a:rPr lang="en-US"/>
+              <a:rPr lang="en-US" smtClean="0"/>
               <a:t>Click to edit Master title style</a:t>
             </a:r>
+            <a:endParaRPr lang="en-US"/>
           </a:p>
         </p:txBody>
       </p:sp>
@@ -2494,7 +2497,7 @@
           <a:p>
             <a:pPr lvl="0"/>
             <a:r>
-              <a:rPr lang="en-US"/>
+              <a:rPr lang="en-US" smtClean="0"/>
               <a:t>Click to edit Master text styles</a:t>
             </a:r>
           </a:p>
@@ -2517,7 +2520,7 @@
           <a:p>
             <a:fld id="{5BCAD085-E8A6-8845-BD4E-CB4CCA059FC4}" type="datetimeFigureOut">
               <a:rPr lang="en-US" smtClean="0"/>
-              <a:t>6/6/26</a:t>
+              <a:t>1/27/13</a:t>
             </a:fld>
             <a:endParaRPr lang="en-US"/>
           </a:p>
@@ -2626,9 +2629,10 @@
           <a:lstStyle/>
           <a:p>
             <a:r>
-              <a:rPr lang="en-US"/>
+              <a:rPr lang="en-US" smtClean="0"/>
               <a:t>Click to edit Master title style</a:t>
             </a:r>
+            <a:endParaRPr lang="en-US"/>
           </a:p>
         </p:txBody>
       </p:sp>
@@ -2659,37 +2663,38 @@
           <a:p>
             <a:pPr lvl="0"/>
             <a:r>
-              <a:rPr lang="en-US"/>
+              <a:rPr lang="en-US" smtClean="0"/>
               <a:t>Click to edit Master text styles</a:t>
             </a:r>
           </a:p>
           <a:p>
             <a:pPr lvl="1"/>
             <a:r>
-              <a:rPr lang="en-US"/>
+              <a:rPr lang="en-US" smtClean="0"/>
               <a:t>Second level</a:t>
             </a:r>
           </a:p>
           <a:p>
             <a:pPr lvl="2"/>
             <a:r>
-              <a:rPr lang="en-US"/>
+              <a:rPr lang="en-US" smtClean="0"/>
               <a:t>Third level</a:t>
             </a:r>
           </a:p>
           <a:p>
             <a:pPr lvl="3"/>
             <a:r>
-              <a:rPr lang="en-US"/>
+              <a:rPr lang="en-US" smtClean="0"/>
               <a:t>Fourth level</a:t>
             </a:r>
           </a:p>
           <a:p>
             <a:pPr lvl="4"/>
             <a:r>
-              <a:rPr lang="en-US"/>
+              <a:rPr lang="en-US" smtClean="0"/>
               <a:t>Fifth level</a:t>
             </a:r>
+            <a:endParaRPr lang="en-US"/>
           </a:p>
         </p:txBody>
       </p:sp>
@@ -2728,7 +2733,7 @@
           <a:p>
             <a:fld id="{5BCAD085-E8A6-8845-BD4E-CB4CCA059FC4}" type="datetimeFigureOut">
               <a:rPr lang="en-US" smtClean="0"/>
-              <a:t>6/6/26</a:t>
+              <a:t>1/27/13</a:t>
             </a:fld>
             <a:endParaRPr lang="en-US"/>
           </a:p>
@@ -3087,7 +3092,7 @@
 </file>
 
 <file path=ppt/slides/slide1.xml><?xml version="1.0" encoding="utf-8"?>
-<p:sld xmlns:a="http://schemas.openxmlformats.org/drawingml/2006/main" xmlns:r="http://schemas.openxmlformats.org/officeDocument/2006/relationships" xmlns:p="http://schemas.openxmlformats.org/presentationml/2006/main">
+<p:sld xmlns:a="http://schemas.openxmlformats.org/drawingml/2006/main" xmlns:p="http://schemas.openxmlformats.org/presentationml/2006/main" xmlns:r="http://schemas.openxmlformats.org/officeDocument/2006/relationships">
   <p:cSld>
     <p:bg>
       <p:bgPr>
@@ -3103,14 +3108,7 @@
         <p:cNvGrpSpPr/>
         <p:nvPr/>
       </p:nvGrpSpPr>
-      <p:grpSpPr>
-        <a:xfrm>
-          <a:off x="0" y="0"/>
-          <a:ext cx="0" cy="0"/>
-          <a:chOff x="0" y="0"/>
-          <a:chExt cx="0" cy="0"/>
-        </a:xfrm>
-      </p:grpSpPr>
+      <p:grpSpPr/>
       <p:sp>
         <p:nvSpPr>
           <p:cNvPr id="2" name="Rectangle 1"/>
@@ -3152,20 +3150,43 @@
           <a:lstStyle/>
           <a:p>
             <a:pPr algn="ctr"/>
-            <a:endParaRPr/>
-          </a:p>
-        </p:txBody>
-      </p:sp>
-      <p:sp>
-        <p:nvSpPr>
-          <p:cNvPr id="3" name="TextBox 2"/>
+          </a:p>
+        </p:txBody>
+      </p:sp>
+      <p:pic>
+        <p:nvPicPr>
+          <p:cNvPr id="3" name="Picture 2" descr="jarvis-logo.png"/>
+          <p:cNvPicPr>
+            <a:picLocks noChangeAspect="1"/>
+          </p:cNvPicPr>
+          <p:nvPr/>
+        </p:nvPicPr>
+        <p:blipFill>
+          <a:blip r:embed="rId2"/>
+          <a:stretch>
+            <a:fillRect/>
+          </a:stretch>
+        </p:blipFill>
+        <p:spPr>
+          <a:xfrm>
+            <a:off x="960120" y="1234440"/>
+            <a:ext cx="3657600" cy="4389120"/>
+          </a:xfrm>
+          <a:prstGeom prst="rect">
+            <a:avLst/>
+          </a:prstGeom>
+        </p:spPr>
+      </p:pic>
+      <p:sp>
+        <p:nvSpPr>
+          <p:cNvPr id="4" name="TextBox 3"/>
           <p:cNvSpPr txBox="1"/>
           <p:nvPr/>
         </p:nvSpPr>
         <p:spPr>
           <a:xfrm>
-            <a:off x="1005840" y="1828800"/>
-            <a:ext cx="10058400" cy="365760"/>
+            <a:off x="5257800" y="2103120"/>
+            <a:ext cx="6263640" cy="365760"/>
           </a:xfrm>
           <a:prstGeom prst="rect">
             <a:avLst/>
@@ -3173,7 +3194,7 @@
           <a:noFill/>
         </p:spPr>
         <p:txBody>
-          <a:bodyPr wrap="square" lIns="0" tIns="0" rIns="0" bIns="0">
+          <a:bodyPr wrap="square" lIns="0" rIns="0" tIns="0" bIns="0">
             <a:spAutoFit/>
           </a:bodyPr>
           <a:lstStyle/>
@@ -3192,14 +3213,14 @@
       </p:sp>
       <p:sp>
         <p:nvSpPr>
-          <p:cNvPr id="4" name="TextBox 3"/>
+          <p:cNvPr id="5" name="TextBox 4"/>
           <p:cNvSpPr txBox="1"/>
           <p:nvPr/>
         </p:nvSpPr>
         <p:spPr>
           <a:xfrm>
-            <a:off x="1005840" y="2286000"/>
-            <a:ext cx="10332720" cy="1463040"/>
+            <a:off x="5257800" y="2606040"/>
+            <a:ext cx="6263640" cy="1645920"/>
           </a:xfrm>
           <a:prstGeom prst="rect">
             <a:avLst/>
@@ -3207,33 +3228,33 @@
           <a:noFill/>
         </p:spPr>
         <p:txBody>
-          <a:bodyPr wrap="square" lIns="0" tIns="0" rIns="0" bIns="0">
+          <a:bodyPr wrap="square" lIns="0" rIns="0" tIns="0" bIns="0">
             <a:spAutoFit/>
           </a:bodyPr>
           <a:lstStyle/>
           <a:p>
             <a:r>
-              <a:rPr sz="5200" b="1" i="0">
+              <a:rPr sz="2700" b="1" i="0">
                 <a:solidFill>
                   <a:srgbClr val="1C212E"/>
                 </a:solidFill>
                 <a:latin typeface="Calibri"/>
               </a:rPr>
-              <a:t>JARVIS</a:t>
-            </a:r>
-          </a:p>
-        </p:txBody>
-      </p:sp>
-      <p:sp>
-        <p:nvSpPr>
-          <p:cNvPr id="5" name="Rectangle 4"/>
+              <a:t>A real-time, on-device legal &amp; de-escalation copilot for frontline officers</a:t>
+            </a:r>
+          </a:p>
+        </p:txBody>
+      </p:sp>
+      <p:sp>
+        <p:nvSpPr>
+          <p:cNvPr id="6" name="Rectangle 5"/>
           <p:cNvSpPr/>
           <p:nvPr/>
         </p:nvSpPr>
         <p:spPr>
           <a:xfrm>
-            <a:off x="1033271" y="3703320"/>
-            <a:ext cx="2194560" cy="50800"/>
+            <a:off x="5257800" y="4297680"/>
+            <a:ext cx="1828800" cy="50800"/>
           </a:xfrm>
           <a:prstGeom prst="rect">
             <a:avLst/>
@@ -3265,20 +3286,19 @@
           <a:lstStyle/>
           <a:p>
             <a:pPr algn="ctr"/>
-            <a:endParaRPr/>
-          </a:p>
-        </p:txBody>
-      </p:sp>
-      <p:sp>
-        <p:nvSpPr>
-          <p:cNvPr id="6" name="TextBox 5"/>
+          </a:p>
+        </p:txBody>
+      </p:sp>
+      <p:sp>
+        <p:nvSpPr>
+          <p:cNvPr id="7" name="TextBox 6"/>
           <p:cNvSpPr txBox="1"/>
           <p:nvPr/>
         </p:nvSpPr>
         <p:spPr>
           <a:xfrm>
-            <a:off x="1005840" y="3931920"/>
-            <a:ext cx="10058400" cy="914400"/>
+            <a:off x="5257800" y="4526280"/>
+            <a:ext cx="6263640" cy="914400"/>
           </a:xfrm>
           <a:prstGeom prst="rect">
             <a:avLst/>
@@ -3286,53 +3306,19 @@
           <a:noFill/>
         </p:spPr>
         <p:txBody>
-          <a:bodyPr wrap="square" lIns="0" tIns="0" rIns="0" bIns="0">
+          <a:bodyPr wrap="square" lIns="0" rIns="0" tIns="0" bIns="0">
             <a:spAutoFit/>
           </a:bodyPr>
           <a:lstStyle/>
           <a:p>
             <a:r>
-              <a:rPr sz="2200" b="0" i="0">
-                <a:solidFill>
-                  <a:srgbClr val="3B4252"/>
-                </a:solidFill>
-                <a:latin typeface="Calibri"/>
-              </a:rPr>
-              <a:t>Judicial Advisor &amp; Real-time Voice Intelligence System</a:t>
-            </a:r>
-          </a:p>
-        </p:txBody>
-      </p:sp>
-      <p:sp>
-        <p:nvSpPr>
-          <p:cNvPr id="7" name="TextBox 6"/>
-          <p:cNvSpPr txBox="1"/>
-          <p:nvPr/>
-        </p:nvSpPr>
-        <p:spPr>
-          <a:xfrm>
-            <a:off x="1005840" y="5669280"/>
-            <a:ext cx="10058400" cy="548640"/>
-          </a:xfrm>
-          <a:prstGeom prst="rect">
-            <a:avLst/>
-          </a:prstGeom>
-          <a:noFill/>
-        </p:spPr>
-        <p:txBody>
-          <a:bodyPr wrap="square" lIns="0" tIns="0" rIns="0" bIns="0">
-            <a:spAutoFit/>
-          </a:bodyPr>
-          <a:lstStyle/>
-          <a:p>
-            <a:r>
               <a:rPr sz="1500" b="0" i="1">
                 <a:solidFill>
                   <a:srgbClr val="6B7280"/>
                 </a:solidFill>
                 <a:latin typeface="Calibri"/>
               </a:rPr>
-              <a:t>A real-time, on-device legal &amp; de-escalation copilot for frontline officers — assistive and human-in-the-loop. It cites the law; it never decides.</a:t>
+              <a:t>Assistive and human-in-the-loop. It cites the law; it never decides.</a:t>
             </a:r>
           </a:p>
         </p:txBody>
@@ -3346,7 +3332,7 @@
 </file>
 
 <file path=ppt/slides/slide10.xml><?xml version="1.0" encoding="utf-8"?>
-<p:sld xmlns:a="http://schemas.openxmlformats.org/drawingml/2006/main" xmlns:r="http://schemas.openxmlformats.org/officeDocument/2006/relationships" xmlns:p="http://schemas.openxmlformats.org/presentationml/2006/main">
+<p:sld xmlns:a="http://schemas.openxmlformats.org/drawingml/2006/main" xmlns:p="http://schemas.openxmlformats.org/presentationml/2006/main" xmlns:r="http://schemas.openxmlformats.org/officeDocument/2006/relationships">
   <p:cSld>
     <p:bg>
       <p:bgPr>
@@ -3362,14 +3348,7 @@
         <p:cNvGrpSpPr/>
         <p:nvPr/>
       </p:nvGrpSpPr>
-      <p:grpSpPr>
-        <a:xfrm>
-          <a:off x="0" y="0"/>
-          <a:ext cx="0" cy="0"/>
-          <a:chOff x="0" y="0"/>
-          <a:chExt cx="0" cy="0"/>
-        </a:xfrm>
-      </p:grpSpPr>
+      <p:grpSpPr/>
       <p:sp>
         <p:nvSpPr>
           <p:cNvPr id="2" name="Rectangle 1"/>
@@ -3411,7 +3390,6 @@
           <a:lstStyle/>
           <a:p>
             <a:pPr algn="ctr"/>
-            <a:endParaRPr/>
           </a:p>
         </p:txBody>
       </p:sp>
@@ -3424,7 +3402,7 @@
         <p:spPr>
           <a:xfrm>
             <a:off x="777240" y="502920"/>
-            <a:ext cx="10637215" cy="184666"/>
+            <a:ext cx="10637215" cy="274320"/>
           </a:xfrm>
           <a:prstGeom prst="rect">
             <a:avLst/>
@@ -3432,26 +3410,20 @@
           <a:noFill/>
         </p:spPr>
         <p:txBody>
-          <a:bodyPr wrap="square" lIns="0" tIns="0" rIns="0" bIns="0">
+          <a:bodyPr wrap="square" lIns="0" rIns="0" tIns="0" bIns="0">
             <a:spAutoFit/>
           </a:bodyPr>
           <a:lstStyle/>
           <a:p>
             <a:r>
-              <a:rPr sz="1200" b="1" i="0" dirty="0">
+              <a:rPr sz="1200" b="1" i="0">
                 <a:solidFill>
                   <a:srgbClr val="4E7A00"/>
                 </a:solidFill>
                 <a:latin typeface="Calibri"/>
               </a:rPr>
-              <a:t>INNOVATION</a:t>
-            </a:r>
-            <a:endParaRPr lang="en-GB" sz="1200" b="1" i="0" dirty="0">
-              <a:solidFill>
-                <a:srgbClr val="4E7A00"/>
-              </a:solidFill>
-              <a:latin typeface="Calibri"/>
-            </a:endParaRPr>
+              <a:t>INNOVATION · 20 PTS</a:t>
+            </a:r>
           </a:p>
         </p:txBody>
       </p:sp>
@@ -3472,7 +3444,7 @@
           <a:noFill/>
         </p:spPr>
         <p:txBody>
-          <a:bodyPr wrap="square" lIns="0" tIns="0" rIns="0" bIns="0">
+          <a:bodyPr wrap="square" lIns="0" rIns="0" tIns="0" bIns="0">
             <a:spAutoFit/>
           </a:bodyPr>
           <a:lstStyle/>
@@ -3530,7 +3502,6 @@
           <a:lstStyle/>
           <a:p>
             <a:pPr algn="ctr"/>
-            <a:endParaRPr/>
           </a:p>
         </p:txBody>
       </p:sp>
@@ -3543,7 +3514,7 @@
         <p:spPr>
           <a:xfrm>
             <a:off x="777240" y="1719072"/>
-            <a:ext cx="10637215" cy="3082895"/>
+            <a:ext cx="10637215" cy="4407408"/>
           </a:xfrm>
           <a:prstGeom prst="rect">
             <a:avLst/>
@@ -3551,7 +3522,7 @@
           <a:noFill/>
         </p:spPr>
         <p:txBody>
-          <a:bodyPr wrap="square" lIns="0" tIns="0" rIns="0" bIns="0">
+          <a:bodyPr wrap="square" lIns="0" rIns="0" tIns="0" bIns="0">
             <a:spAutoFit/>
           </a:bodyPr>
           <a:lstStyle/>
@@ -3565,7 +3536,7 @@
               </a:spcAft>
             </a:pPr>
             <a:r>
-              <a:rPr sz="1900" b="1" i="0" dirty="0">
+              <a:rPr sz="1900" b="1" i="0">
                 <a:solidFill>
                   <a:srgbClr val="4E7A00"/>
                 </a:solidFill>
@@ -3581,7 +3552,7 @@
               </a:spcBef>
             </a:pPr>
             <a:r>
-              <a:rPr sz="1700" b="1" i="0" dirty="0">
+              <a:rPr sz="1700" b="1" i="0">
                 <a:solidFill>
                   <a:srgbClr val="76B900"/>
                 </a:solidFill>
@@ -3590,31 +3561,13 @@
               <a:t>•  </a:t>
             </a:r>
             <a:r>
-              <a:rPr sz="1700" b="0" i="0" dirty="0">
+              <a:rPr sz="1700" b="0" i="0">
                 <a:solidFill>
                   <a:srgbClr val="1C212E"/>
                 </a:solidFill>
                 <a:latin typeface="Calibri"/>
               </a:rPr>
-              <a:t>Vision (scene) + speaker </a:t>
-            </a:r>
-            <a:r>
-              <a:rPr sz="1700" b="0" i="0" dirty="0" err="1">
-                <a:solidFill>
-                  <a:srgbClr val="1C212E"/>
-                </a:solidFill>
-                <a:latin typeface="Calibri"/>
-              </a:rPr>
-              <a:t>diarization</a:t>
-            </a:r>
-            <a:r>
-              <a:rPr sz="1700" b="0" i="0" dirty="0">
-                <a:solidFill>
-                  <a:srgbClr val="1C212E"/>
-                </a:solidFill>
-                <a:latin typeface="Calibri"/>
-              </a:rPr>
-              <a:t> (officer vs. subject) + legal RAG reasoning + voice — reads the scene and the law together, in real time.</a:t>
+              <a:t>Vision (scene) + speaker diarization (officer vs. subject) + legal RAG reasoning + voice — reads the scene and the law together, in real time.</a:t>
             </a:r>
           </a:p>
           <a:p>
@@ -3624,7 +3577,7 @@
               </a:spcBef>
             </a:pPr>
             <a:r>
-              <a:rPr sz="1700" b="1" i="0" dirty="0">
+              <a:rPr sz="1700" b="1" i="0">
                 <a:solidFill>
                   <a:srgbClr val="76B900"/>
                 </a:solidFill>
@@ -3633,7 +3586,7 @@
               <a:t>•  </a:t>
             </a:r>
             <a:r>
-              <a:rPr sz="1700" b="0" i="0" dirty="0">
+              <a:rPr sz="1700" b="0" i="0">
                 <a:solidFill>
                   <a:srgbClr val="1C212E"/>
                 </a:solidFill>
@@ -3652,7 +3605,7 @@
               </a:spcAft>
             </a:pPr>
             <a:r>
-              <a:rPr sz="1900" b="1" i="0" dirty="0">
+              <a:rPr sz="1900" b="1" i="0">
                 <a:solidFill>
                   <a:srgbClr val="4E7A00"/>
                 </a:solidFill>
@@ -3668,7 +3621,7 @@
               </a:spcBef>
             </a:pPr>
             <a:r>
-              <a:rPr sz="1700" b="1" i="0" dirty="0">
+              <a:rPr sz="1700" b="1" i="0">
                 <a:solidFill>
                   <a:srgbClr val="76B900"/>
                 </a:solidFill>
@@ -3677,7 +3630,7 @@
               <a:t>•  </a:t>
             </a:r>
             <a:r>
-              <a:rPr sz="1700" b="0" i="0" dirty="0">
+              <a:rPr sz="1700" b="0" i="0">
                 <a:solidFill>
                   <a:srgbClr val="1C212E"/>
                 </a:solidFill>
@@ -3693,7 +3646,7 @@
               </a:spcBef>
             </a:pPr>
             <a:r>
-              <a:rPr sz="1700" b="1" i="0" dirty="0">
+              <a:rPr sz="1700" b="1" i="0">
                 <a:solidFill>
                   <a:srgbClr val="76B900"/>
                 </a:solidFill>
@@ -3702,85 +3655,13 @@
               <a:t>•  </a:t>
             </a:r>
             <a:r>
-              <a:rPr sz="1700" b="0" i="0" dirty="0">
+              <a:rPr sz="1700" b="0" i="0">
                 <a:solidFill>
                   <a:srgbClr val="1C212E"/>
                 </a:solidFill>
                 <a:latin typeface="Calibri"/>
               </a:rPr>
-              <a:t>FP</a:t>
-            </a:r>
-            <a:r>
-              <a:rPr lang="en-GB" sz="1700" b="0" i="0" dirty="0">
-                <a:solidFill>
-                  <a:srgbClr val="1C212E"/>
-                </a:solidFill>
-                <a:latin typeface="Calibri"/>
-              </a:rPr>
-              <a:t>16</a:t>
-            </a:r>
-            <a:r>
-              <a:rPr sz="1700" b="0" i="0" dirty="0">
-                <a:solidFill>
-                  <a:srgbClr val="1C212E"/>
-                </a:solidFill>
-                <a:latin typeface="Calibri"/>
-              </a:rPr>
-              <a:t> </a:t>
-            </a:r>
-            <a:r>
-              <a:rPr sz="1700" b="0" i="0" dirty="0" err="1">
-                <a:solidFill>
-                  <a:srgbClr val="1C212E"/>
-                </a:solidFill>
-                <a:latin typeface="Calibri"/>
-              </a:rPr>
-              <a:t>QLoRA</a:t>
-            </a:r>
-            <a:r>
-              <a:rPr sz="1700" b="0" i="0" dirty="0">
-                <a:solidFill>
-                  <a:srgbClr val="1C212E"/>
-                </a:solidFill>
-                <a:latin typeface="Calibri"/>
-              </a:rPr>
-              <a:t> → 49B fine-tune fits in ~</a:t>
-            </a:r>
-            <a:r>
-              <a:rPr lang="en-GB" sz="1700" b="0" i="0" dirty="0">
-                <a:solidFill>
-                  <a:srgbClr val="1C212E"/>
-                </a:solidFill>
-                <a:latin typeface="Calibri"/>
-              </a:rPr>
-              <a:t>9</a:t>
-            </a:r>
-            <a:r>
-              <a:rPr sz="1700" b="0" i="0" dirty="0">
-                <a:solidFill>
-                  <a:srgbClr val="1C212E"/>
-                </a:solidFill>
-                <a:latin typeface="Calibri"/>
-              </a:rPr>
-              <a:t>8 GB; quantized GGUF  served via </a:t>
-            </a:r>
-            <a:r>
-              <a:rPr sz="1700" b="0" i="0" dirty="0" err="1">
-                <a:solidFill>
-                  <a:srgbClr val="1C212E"/>
-                </a:solidFill>
-                <a:latin typeface="Calibri"/>
-              </a:rPr>
-              <a:t>llama.cpp</a:t>
-            </a:r>
-            <a:r>
-              <a:rPr sz="1700" b="0" i="0" dirty="0">
-                <a:solidFill>
-                  <a:srgbClr val="1C212E"/>
-                </a:solidFill>
-                <a:latin typeface="Calibri"/>
-              </a:rPr>
-              <a:t>.</a:t>
+              <a:t>FP16 QLoRA → 49B fine-tune fits in ~98 GB; quantized GGUF served via llama.cpp.</a:t>
             </a:r>
           </a:p>
           <a:p>
@@ -3790,7 +3671,7 @@
               </a:spcBef>
             </a:pPr>
             <a:r>
-              <a:rPr sz="1700" b="1" i="0" dirty="0">
+              <a:rPr sz="1700" b="1" i="0">
                 <a:solidFill>
                   <a:srgbClr val="76B900"/>
                 </a:solidFill>
@@ -3799,31 +3680,13 @@
               <a:t>•  </a:t>
             </a:r>
             <a:r>
-              <a:rPr sz="1700" b="0" i="0" dirty="0">
+              <a:rPr sz="1700" b="0" i="0">
                 <a:solidFill>
                   <a:srgbClr val="1C212E"/>
                 </a:solidFill>
                 <a:latin typeface="Calibri"/>
               </a:rPr>
-              <a:t>Local </a:t>
-            </a:r>
-            <a:r>
-              <a:rPr sz="1700" b="0" i="0" dirty="0" err="1">
-                <a:solidFill>
-                  <a:srgbClr val="1C212E"/>
-                </a:solidFill>
-                <a:latin typeface="Calibri"/>
-              </a:rPr>
-              <a:t>resemblyzer</a:t>
-            </a:r>
-            <a:r>
-              <a:rPr sz="1700" b="0" i="0" dirty="0">
-                <a:solidFill>
-                  <a:srgbClr val="1C212E"/>
-                </a:solidFill>
-                <a:latin typeface="Calibri"/>
-              </a:rPr>
-              <a:t> voice embeddings → speaker labels with no API call.</a:t>
+              <a:t>Local resemblyzer voice embeddings → speaker labels with no API call.</a:t>
             </a:r>
           </a:p>
         </p:txBody>
@@ -3869,7 +3732,6 @@
           <a:lstStyle/>
           <a:p>
             <a:pPr algn="ctr"/>
-            <a:endParaRPr/>
           </a:p>
         </p:txBody>
       </p:sp>
@@ -3890,7 +3752,7 @@
           <a:noFill/>
         </p:spPr>
         <p:txBody>
-          <a:bodyPr wrap="square" lIns="0" tIns="0" rIns="0" bIns="0">
+          <a:bodyPr wrap="square" lIns="0" rIns="0" tIns="0" bIns="0">
             <a:spAutoFit/>
           </a:bodyPr>
           <a:lstStyle/>
@@ -3924,7 +3786,7 @@
           <a:noFill/>
         </p:spPr>
         <p:txBody>
-          <a:bodyPr wrap="square" lIns="0" tIns="0" rIns="0" bIns="0">
+          <a:bodyPr wrap="square" lIns="0" rIns="0" tIns="0" bIns="0">
             <a:spAutoFit/>
           </a:bodyPr>
           <a:lstStyle/>
@@ -3951,7 +3813,7 @@
 </file>
 
 <file path=ppt/slides/slide11.xml><?xml version="1.0" encoding="utf-8"?>
-<p:sld xmlns:a="http://schemas.openxmlformats.org/drawingml/2006/main" xmlns:r="http://schemas.openxmlformats.org/officeDocument/2006/relationships" xmlns:p="http://schemas.openxmlformats.org/presentationml/2006/main">
+<p:sld xmlns:a="http://schemas.openxmlformats.org/drawingml/2006/main" xmlns:p="http://schemas.openxmlformats.org/presentationml/2006/main" xmlns:r="http://schemas.openxmlformats.org/officeDocument/2006/relationships">
   <p:cSld>
     <p:bg>
       <p:bgPr>
@@ -3967,14 +3829,7 @@
         <p:cNvGrpSpPr/>
         <p:nvPr/>
       </p:nvGrpSpPr>
-      <p:grpSpPr>
-        <a:xfrm>
-          <a:off x="0" y="0"/>
-          <a:ext cx="0" cy="0"/>
-          <a:chOff x="0" y="0"/>
-          <a:chExt cx="0" cy="0"/>
-        </a:xfrm>
-      </p:grpSpPr>
+      <p:grpSpPr/>
       <p:sp>
         <p:nvSpPr>
           <p:cNvPr id="2" name="Rectangle 1"/>
@@ -4016,7 +3871,6 @@
           <a:lstStyle/>
           <a:p>
             <a:pPr algn="ctr"/>
-            <a:endParaRPr/>
           </a:p>
         </p:txBody>
       </p:sp>
@@ -4037,7 +3891,7 @@
           <a:noFill/>
         </p:spPr>
         <p:txBody>
-          <a:bodyPr wrap="square" lIns="0" tIns="0" rIns="0" bIns="0">
+          <a:bodyPr wrap="square" lIns="0" rIns="0" tIns="0" bIns="0">
             <a:spAutoFit/>
           </a:bodyPr>
           <a:lstStyle/>
@@ -4071,7 +3925,7 @@
           <a:noFill/>
         </p:spPr>
         <p:txBody>
-          <a:bodyPr wrap="square" lIns="0" tIns="0" rIns="0" bIns="0">
+          <a:bodyPr wrap="square" lIns="0" rIns="0" tIns="0" bIns="0">
             <a:spAutoFit/>
           </a:bodyPr>
           <a:lstStyle/>
@@ -4129,7 +3983,6 @@
           <a:lstStyle/>
           <a:p>
             <a:pPr algn="ctr"/>
-            <a:endParaRPr/>
           </a:p>
         </p:txBody>
       </p:sp>
@@ -4142,7 +3995,7 @@
         <p:spPr>
           <a:xfrm>
             <a:off x="777240" y="1719072"/>
-            <a:ext cx="10637215" cy="2523768"/>
+            <a:ext cx="10637215" cy="4407408"/>
           </a:xfrm>
           <a:prstGeom prst="rect">
             <a:avLst/>
@@ -4150,7 +4003,7 @@
           <a:noFill/>
         </p:spPr>
         <p:txBody>
-          <a:bodyPr wrap="square" lIns="0" tIns="0" rIns="0" bIns="0">
+          <a:bodyPr wrap="square" lIns="0" rIns="0" tIns="0" bIns="0">
             <a:spAutoFit/>
           </a:bodyPr>
           <a:lstStyle/>
@@ -4164,7 +4017,7 @@
               </a:spcAft>
             </a:pPr>
             <a:r>
-              <a:rPr lang="en-GB" sz="1900" b="1" i="0" dirty="0">
+              <a:rPr sz="1900" b="1" i="0">
                 <a:solidFill>
                   <a:srgbClr val="4E7A00"/>
                 </a:solidFill>
@@ -4180,7 +4033,7 @@
               </a:spcBef>
             </a:pPr>
             <a:r>
-              <a:rPr sz="1700" b="1" i="0" dirty="0">
+              <a:rPr sz="1700" b="1" i="0">
                 <a:solidFill>
                   <a:srgbClr val="76B900"/>
                 </a:solidFill>
@@ -4189,7 +4042,7 @@
               <a:t>•  </a:t>
             </a:r>
             <a:r>
-              <a:rPr sz="1700" b="0" i="0" dirty="0">
+              <a:rPr sz="1700" b="0" i="0">
                 <a:solidFill>
                   <a:srgbClr val="1C212E"/>
                 </a:solidFill>
@@ -4205,7 +4058,7 @@
               </a:spcBef>
             </a:pPr>
             <a:r>
-              <a:rPr sz="1700" b="1" i="0" dirty="0">
+              <a:rPr sz="1700" b="1" i="0">
                 <a:solidFill>
                   <a:srgbClr val="76B900"/>
                 </a:solidFill>
@@ -4214,7 +4067,7 @@
               <a:t>•  </a:t>
             </a:r>
             <a:r>
-              <a:rPr sz="1700" b="0" i="0" dirty="0">
+              <a:rPr sz="1700" b="0" i="0">
                 <a:solidFill>
                   <a:srgbClr val="1C212E"/>
                 </a:solidFill>
@@ -4230,7 +4083,7 @@
               </a:spcBef>
             </a:pPr>
             <a:r>
-              <a:rPr sz="1700" b="1" i="0" dirty="0">
+              <a:rPr sz="1700" b="1" i="0">
                 <a:solidFill>
                   <a:srgbClr val="76B900"/>
                 </a:solidFill>
@@ -4239,7 +4092,7 @@
               <a:t>•  </a:t>
             </a:r>
             <a:r>
-              <a:rPr sz="1700" b="0" i="0" dirty="0">
+              <a:rPr sz="1700" b="0" i="0">
                 <a:solidFill>
                   <a:srgbClr val="1C212E"/>
                 </a:solidFill>
@@ -4258,7 +4111,7 @@
               </a:spcAft>
             </a:pPr>
             <a:r>
-              <a:rPr sz="1900" b="1" i="0" dirty="0">
+              <a:rPr sz="1900" b="1" i="0">
                 <a:solidFill>
                   <a:srgbClr val="4E7A00"/>
                 </a:solidFill>
@@ -4274,7 +4127,7 @@
               </a:spcBef>
             </a:pPr>
             <a:r>
-              <a:rPr sz="1600" b="0" i="1" dirty="0">
+              <a:rPr sz="1600" b="0" i="1">
                 <a:solidFill>
                   <a:srgbClr val="3B4252"/>
                 </a:solidFill>
@@ -4326,7 +4179,6 @@
           <a:lstStyle/>
           <a:p>
             <a:pPr algn="ctr"/>
-            <a:endParaRPr/>
           </a:p>
         </p:txBody>
       </p:sp>
@@ -4347,7 +4199,7 @@
           <a:noFill/>
         </p:spPr>
         <p:txBody>
-          <a:bodyPr wrap="square" lIns="0" tIns="0" rIns="0" bIns="0">
+          <a:bodyPr wrap="square" lIns="0" rIns="0" tIns="0" bIns="0">
             <a:spAutoFit/>
           </a:bodyPr>
           <a:lstStyle/>
@@ -4381,7 +4233,7 @@
           <a:noFill/>
         </p:spPr>
         <p:txBody>
-          <a:bodyPr wrap="square" lIns="0" tIns="0" rIns="0" bIns="0">
+          <a:bodyPr wrap="square" lIns="0" rIns="0" tIns="0" bIns="0">
             <a:spAutoFit/>
           </a:bodyPr>
           <a:lstStyle/>
@@ -4394,7 +4246,7 @@
                 </a:solidFill>
                 <a:latin typeface="Calibri"/>
               </a:rPr>
-              <a:t>11</a:t>
+              <a:t>10</a:t>
             </a:r>
           </a:p>
         </p:txBody>
@@ -4408,7 +4260,7 @@
 </file>
 
 <file path=ppt/slides/slide12.xml><?xml version="1.0" encoding="utf-8"?>
-<p:sld xmlns:a="http://schemas.openxmlformats.org/drawingml/2006/main" xmlns:r="http://schemas.openxmlformats.org/officeDocument/2006/relationships" xmlns:p="http://schemas.openxmlformats.org/presentationml/2006/main">
+<p:sld xmlns:a="http://schemas.openxmlformats.org/drawingml/2006/main" xmlns:p="http://schemas.openxmlformats.org/presentationml/2006/main" xmlns:r="http://schemas.openxmlformats.org/officeDocument/2006/relationships">
   <p:cSld>
     <p:bg>
       <p:bgPr>
@@ -4424,14 +4276,7 @@
         <p:cNvGrpSpPr/>
         <p:nvPr/>
       </p:nvGrpSpPr>
-      <p:grpSpPr>
-        <a:xfrm>
-          <a:off x="0" y="0"/>
-          <a:ext cx="0" cy="0"/>
-          <a:chOff x="0" y="0"/>
-          <a:chExt cx="0" cy="0"/>
-        </a:xfrm>
-      </p:grpSpPr>
+      <p:grpSpPr/>
       <p:sp>
         <p:nvSpPr>
           <p:cNvPr id="2" name="Rectangle 1"/>
@@ -4473,7 +4318,6 @@
           <a:lstStyle/>
           <a:p>
             <a:pPr algn="ctr"/>
-            <a:endParaRPr/>
           </a:p>
         </p:txBody>
       </p:sp>
@@ -4518,13 +4362,36 @@
           <a:lstStyle/>
           <a:p>
             <a:pPr algn="ctr"/>
-            <a:endParaRPr/>
-          </a:p>
-        </p:txBody>
-      </p:sp>
-      <p:sp>
-        <p:nvSpPr>
-          <p:cNvPr id="4" name="TextBox 3"/>
+          </a:p>
+        </p:txBody>
+      </p:sp>
+      <p:pic>
+        <p:nvPicPr>
+          <p:cNvPr id="4" name="Picture 3" descr="jarvis-logo.png"/>
+          <p:cNvPicPr>
+            <a:picLocks noChangeAspect="1"/>
+          </p:cNvPicPr>
+          <p:nvPr/>
+        </p:nvPicPr>
+        <p:blipFill>
+          <a:blip r:embed="rId2"/>
+          <a:stretch>
+            <a:fillRect/>
+          </a:stretch>
+        </p:blipFill>
+        <p:spPr>
+          <a:xfrm>
+            <a:off x="9859975" y="640080"/>
+            <a:ext cx="1524000" cy="1828800"/>
+          </a:xfrm>
+          <a:prstGeom prst="rect">
+            <a:avLst/>
+          </a:prstGeom>
+        </p:spPr>
+      </p:pic>
+      <p:sp>
+        <p:nvSpPr>
+          <p:cNvPr id="5" name="TextBox 4"/>
           <p:cNvSpPr txBox="1"/>
           <p:nvPr/>
         </p:nvSpPr>
@@ -4539,7 +4406,7 @@
           <a:noFill/>
         </p:spPr>
         <p:txBody>
-          <a:bodyPr wrap="square" lIns="0" tIns="0" rIns="0" bIns="0">
+          <a:bodyPr wrap="square" lIns="0" rIns="0" tIns="0" bIns="0">
             <a:spAutoFit/>
           </a:bodyPr>
           <a:lstStyle/>
@@ -4558,7 +4425,7 @@
       </p:sp>
       <p:sp>
         <p:nvSpPr>
-          <p:cNvPr id="5" name="TextBox 4"/>
+          <p:cNvPr id="6" name="TextBox 5"/>
           <p:cNvSpPr txBox="1"/>
           <p:nvPr/>
         </p:nvSpPr>
@@ -4573,7 +4440,7 @@
           <a:noFill/>
         </p:spPr>
         <p:txBody>
-          <a:bodyPr wrap="square" lIns="0" tIns="0" rIns="0" bIns="0">
+          <a:bodyPr wrap="square" lIns="0" rIns="0" tIns="0" bIns="0">
             <a:spAutoFit/>
           </a:bodyPr>
           <a:lstStyle/>
@@ -4592,7 +4459,7 @@
       </p:sp>
       <p:sp>
         <p:nvSpPr>
-          <p:cNvPr id="6" name="Rectangle 5"/>
+          <p:cNvPr id="7" name="Rectangle 6"/>
           <p:cNvSpPr/>
           <p:nvPr/>
         </p:nvSpPr>
@@ -4631,13 +4498,12 @@
           <a:lstStyle/>
           <a:p>
             <a:pPr algn="ctr"/>
-            <a:endParaRPr/>
-          </a:p>
-        </p:txBody>
-      </p:sp>
-      <p:sp>
-        <p:nvSpPr>
-          <p:cNvPr id="7" name="TextBox 6"/>
+          </a:p>
+        </p:txBody>
+      </p:sp>
+      <p:sp>
+        <p:nvSpPr>
+          <p:cNvPr id="8" name="TextBox 7"/>
           <p:cNvSpPr txBox="1"/>
           <p:nvPr/>
         </p:nvSpPr>
@@ -4652,7 +4518,7 @@
           <a:noFill/>
         </p:spPr>
         <p:txBody>
-          <a:bodyPr wrap="square" lIns="0" tIns="0" rIns="0" bIns="0">
+          <a:bodyPr wrap="square" lIns="0" rIns="0" tIns="0" bIns="0">
             <a:spAutoFit/>
           </a:bodyPr>
           <a:lstStyle/>
@@ -4678,7 +4544,7 @@
 </file>
 
 <file path=ppt/slides/slide13.xml><?xml version="1.0" encoding="utf-8"?>
-<p:sld xmlns:a="http://schemas.openxmlformats.org/drawingml/2006/main" xmlns:r="http://schemas.openxmlformats.org/officeDocument/2006/relationships" xmlns:p="http://schemas.openxmlformats.org/presentationml/2006/main">
+<p:sld xmlns:a="http://schemas.openxmlformats.org/drawingml/2006/main" xmlns:p="http://schemas.openxmlformats.org/presentationml/2006/main" xmlns:r="http://schemas.openxmlformats.org/officeDocument/2006/relationships">
   <p:cSld>
     <p:bg>
       <p:bgPr>
@@ -4694,14 +4560,7 @@
         <p:cNvGrpSpPr/>
         <p:nvPr/>
       </p:nvGrpSpPr>
-      <p:grpSpPr>
-        <a:xfrm>
-          <a:off x="0" y="0"/>
-          <a:ext cx="0" cy="0"/>
-          <a:chOff x="0" y="0"/>
-          <a:chExt cx="0" cy="0"/>
-        </a:xfrm>
-      </p:grpSpPr>
+      <p:grpSpPr/>
       <p:sp>
         <p:nvSpPr>
           <p:cNvPr id="2" name="Rectangle 1"/>
@@ -4743,7 +4602,6 @@
           <a:lstStyle/>
           <a:p>
             <a:pPr algn="ctr"/>
-            <a:endParaRPr/>
           </a:p>
         </p:txBody>
       </p:sp>
@@ -4764,7 +4622,7 @@
           <a:noFill/>
         </p:spPr>
         <p:txBody>
-          <a:bodyPr wrap="square" lIns="0" tIns="0" rIns="0" bIns="0">
+          <a:bodyPr wrap="square" lIns="0" rIns="0" tIns="0" bIns="0">
             <a:spAutoFit/>
           </a:bodyPr>
           <a:lstStyle/>
@@ -4798,7 +4656,7 @@
           <a:noFill/>
         </p:spPr>
         <p:txBody>
-          <a:bodyPr wrap="square" lIns="0" tIns="0" rIns="0" bIns="0">
+          <a:bodyPr wrap="square" lIns="0" rIns="0" tIns="0" bIns="0">
             <a:spAutoFit/>
           </a:bodyPr>
           <a:lstStyle/>
@@ -4856,7 +4714,6 @@
           <a:lstStyle/>
           <a:p>
             <a:pPr algn="ctr"/>
-            <a:endParaRPr/>
           </a:p>
         </p:txBody>
       </p:sp>
@@ -4877,7 +4734,7 @@
           <a:noFill/>
         </p:spPr>
         <p:txBody>
-          <a:bodyPr wrap="square" lIns="0" tIns="0" rIns="0" bIns="0">
+          <a:bodyPr wrap="square" lIns="0" rIns="0" tIns="0" bIns="0">
             <a:spAutoFit/>
           </a:bodyPr>
           <a:lstStyle/>
@@ -5024,7 +4881,6 @@
           <a:lstStyle/>
           <a:p>
             <a:pPr algn="ctr"/>
-            <a:endParaRPr/>
           </a:p>
         </p:txBody>
       </p:sp>
@@ -5045,7 +4901,7 @@
           <a:noFill/>
         </p:spPr>
         <p:txBody>
-          <a:bodyPr wrap="square" lIns="0" tIns="0" rIns="0" bIns="0">
+          <a:bodyPr wrap="square" lIns="0" rIns="0" tIns="0" bIns="0">
             <a:spAutoFit/>
           </a:bodyPr>
           <a:lstStyle/>
@@ -5079,7 +4935,7 @@
           <a:noFill/>
         </p:spPr>
         <p:txBody>
-          <a:bodyPr wrap="square" lIns="0" tIns="0" rIns="0" bIns="0">
+          <a:bodyPr wrap="square" lIns="0" rIns="0" tIns="0" bIns="0">
             <a:spAutoFit/>
           </a:bodyPr>
           <a:lstStyle/>
@@ -5092,7 +4948,7 @@
                 </a:solidFill>
                 <a:latin typeface="Calibri"/>
               </a:rPr>
-              <a:t>12</a:t>
+              <a:t>11</a:t>
             </a:r>
           </a:p>
         </p:txBody>
@@ -5106,7 +4962,7 @@
 </file>
 
 <file path=ppt/slides/slide14.xml><?xml version="1.0" encoding="utf-8"?>
-<p:sld xmlns:a="http://schemas.openxmlformats.org/drawingml/2006/main" xmlns:r="http://schemas.openxmlformats.org/officeDocument/2006/relationships" xmlns:p="http://schemas.openxmlformats.org/presentationml/2006/main">
+<p:sld xmlns:a="http://schemas.openxmlformats.org/drawingml/2006/main" xmlns:p="http://schemas.openxmlformats.org/presentationml/2006/main" xmlns:r="http://schemas.openxmlformats.org/officeDocument/2006/relationships">
   <p:cSld>
     <p:bg>
       <p:bgPr>
@@ -5122,14 +4978,7 @@
         <p:cNvGrpSpPr/>
         <p:nvPr/>
       </p:nvGrpSpPr>
-      <p:grpSpPr>
-        <a:xfrm>
-          <a:off x="0" y="0"/>
-          <a:ext cx="0" cy="0"/>
-          <a:chOff x="0" y="0"/>
-          <a:chExt cx="0" cy="0"/>
-        </a:xfrm>
-      </p:grpSpPr>
+      <p:grpSpPr/>
       <p:sp>
         <p:nvSpPr>
           <p:cNvPr id="2" name="Rectangle 1"/>
@@ -5171,7 +5020,6 @@
           <a:lstStyle/>
           <a:p>
             <a:pPr algn="ctr"/>
-            <a:endParaRPr/>
           </a:p>
         </p:txBody>
       </p:sp>
@@ -5192,7 +5040,7 @@
           <a:noFill/>
         </p:spPr>
         <p:txBody>
-          <a:bodyPr wrap="square" lIns="0" tIns="0" rIns="0" bIns="0">
+          <a:bodyPr wrap="square" lIns="0" rIns="0" tIns="0" bIns="0">
             <a:spAutoFit/>
           </a:bodyPr>
           <a:lstStyle/>
@@ -5226,7 +5074,7 @@
           <a:noFill/>
         </p:spPr>
         <p:txBody>
-          <a:bodyPr wrap="square" lIns="0" tIns="0" rIns="0" bIns="0">
+          <a:bodyPr wrap="square" lIns="0" rIns="0" tIns="0" bIns="0">
             <a:spAutoFit/>
           </a:bodyPr>
           <a:lstStyle/>
@@ -5284,7 +5132,6 @@
           <a:lstStyle/>
           <a:p>
             <a:pPr algn="ctr"/>
-            <a:endParaRPr/>
           </a:p>
         </p:txBody>
       </p:sp>
@@ -5305,7 +5152,7 @@
           <a:noFill/>
         </p:spPr>
         <p:txBody>
-          <a:bodyPr wrap="square" lIns="0" tIns="0" rIns="0" bIns="0">
+          <a:bodyPr wrap="square" lIns="0" rIns="0" tIns="0" bIns="0">
             <a:spAutoFit/>
           </a:bodyPr>
           <a:lstStyle/>
@@ -5477,7 +5324,6 @@
           <a:lstStyle/>
           <a:p>
             <a:pPr algn="ctr"/>
-            <a:endParaRPr/>
           </a:p>
         </p:txBody>
       </p:sp>
@@ -5498,7 +5344,7 @@
           <a:noFill/>
         </p:spPr>
         <p:txBody>
-          <a:bodyPr wrap="square" lIns="0" tIns="0" rIns="0" bIns="0">
+          <a:bodyPr wrap="square" lIns="0" rIns="0" tIns="0" bIns="0">
             <a:spAutoFit/>
           </a:bodyPr>
           <a:lstStyle/>
@@ -5532,7 +5378,7 @@
           <a:noFill/>
         </p:spPr>
         <p:txBody>
-          <a:bodyPr wrap="square" lIns="0" tIns="0" rIns="0" bIns="0">
+          <a:bodyPr wrap="square" lIns="0" rIns="0" tIns="0" bIns="0">
             <a:spAutoFit/>
           </a:bodyPr>
           <a:lstStyle/>
@@ -5545,7 +5391,7 @@
                 </a:solidFill>
                 <a:latin typeface="Calibri"/>
               </a:rPr>
-              <a:t>13</a:t>
+              <a:t>12</a:t>
             </a:r>
           </a:p>
         </p:txBody>
@@ -5559,7 +5405,7 @@
 </file>
 
 <file path=ppt/slides/slide2.xml><?xml version="1.0" encoding="utf-8"?>
-<p:sld xmlns:a="http://schemas.openxmlformats.org/drawingml/2006/main" xmlns:r="http://schemas.openxmlformats.org/officeDocument/2006/relationships" xmlns:p="http://schemas.openxmlformats.org/presentationml/2006/main">
+<p:sld xmlns:a="http://schemas.openxmlformats.org/drawingml/2006/main" xmlns:p="http://schemas.openxmlformats.org/presentationml/2006/main" xmlns:r="http://schemas.openxmlformats.org/officeDocument/2006/relationships">
   <p:cSld>
     <p:bg>
       <p:bgPr>
@@ -5575,14 +5421,7 @@
         <p:cNvGrpSpPr/>
         <p:nvPr/>
       </p:nvGrpSpPr>
-      <p:grpSpPr>
-        <a:xfrm>
-          <a:off x="0" y="0"/>
-          <a:ext cx="0" cy="0"/>
-          <a:chOff x="0" y="0"/>
-          <a:chExt cx="0" cy="0"/>
-        </a:xfrm>
-      </p:grpSpPr>
+      <p:grpSpPr/>
       <p:sp>
         <p:nvSpPr>
           <p:cNvPr id="2" name="Rectangle 1"/>
@@ -5624,7 +5463,6 @@
           <a:lstStyle/>
           <a:p>
             <a:pPr algn="ctr"/>
-            <a:endParaRPr/>
           </a:p>
         </p:txBody>
       </p:sp>
@@ -5645,7 +5483,7 @@
           <a:noFill/>
         </p:spPr>
         <p:txBody>
-          <a:bodyPr wrap="square" lIns="0" tIns="0" rIns="0" bIns="0">
+          <a:bodyPr wrap="square" lIns="0" rIns="0" tIns="0" bIns="0">
             <a:spAutoFit/>
           </a:bodyPr>
           <a:lstStyle/>
@@ -5679,7 +5517,7 @@
           <a:noFill/>
         </p:spPr>
         <p:txBody>
-          <a:bodyPr wrap="square" lIns="0" tIns="0" rIns="0" bIns="0">
+          <a:bodyPr wrap="square" lIns="0" rIns="0" tIns="0" bIns="0">
             <a:spAutoFit/>
           </a:bodyPr>
           <a:lstStyle/>
@@ -5737,7 +5575,6 @@
           <a:lstStyle/>
           <a:p>
             <a:pPr algn="ctr"/>
-            <a:endParaRPr/>
           </a:p>
         </p:txBody>
       </p:sp>
@@ -5758,7 +5595,7 @@
           <a:noFill/>
         </p:spPr>
         <p:txBody>
-          <a:bodyPr wrap="square" lIns="0" tIns="0" rIns="0" bIns="0">
+          <a:bodyPr wrap="square" lIns="0" rIns="0" tIns="0" bIns="0">
             <a:spAutoFit/>
           </a:bodyPr>
           <a:lstStyle/>
@@ -5934,7 +5771,6 @@
           <a:lstStyle/>
           <a:p>
             <a:pPr algn="ctr"/>
-            <a:endParaRPr/>
           </a:p>
         </p:txBody>
       </p:sp>
@@ -5955,7 +5791,7 @@
           <a:noFill/>
         </p:spPr>
         <p:txBody>
-          <a:bodyPr wrap="square" lIns="0" tIns="0" rIns="0" bIns="0">
+          <a:bodyPr wrap="square" lIns="0" rIns="0" tIns="0" bIns="0">
             <a:spAutoFit/>
           </a:bodyPr>
           <a:lstStyle/>
@@ -5989,7 +5825,7 @@
           <a:noFill/>
         </p:spPr>
         <p:txBody>
-          <a:bodyPr wrap="square" lIns="0" tIns="0" rIns="0" bIns="0">
+          <a:bodyPr wrap="square" lIns="0" rIns="0" tIns="0" bIns="0">
             <a:spAutoFit/>
           </a:bodyPr>
           <a:lstStyle/>
@@ -6016,7 +5852,7 @@
 </file>
 
 <file path=ppt/slides/slide3.xml><?xml version="1.0" encoding="utf-8"?>
-<p:sld xmlns:a="http://schemas.openxmlformats.org/drawingml/2006/main" xmlns:r="http://schemas.openxmlformats.org/officeDocument/2006/relationships" xmlns:p="http://schemas.openxmlformats.org/presentationml/2006/main">
+<p:sld xmlns:a="http://schemas.openxmlformats.org/drawingml/2006/main" xmlns:p="http://schemas.openxmlformats.org/presentationml/2006/main" xmlns:r="http://schemas.openxmlformats.org/officeDocument/2006/relationships">
   <p:cSld>
     <p:bg>
       <p:bgPr>
@@ -6032,14 +5868,7 @@
         <p:cNvGrpSpPr/>
         <p:nvPr/>
       </p:nvGrpSpPr>
-      <p:grpSpPr>
-        <a:xfrm>
-          <a:off x="0" y="0"/>
-          <a:ext cx="0" cy="0"/>
-          <a:chOff x="0" y="0"/>
-          <a:chExt cx="0" cy="0"/>
-        </a:xfrm>
-      </p:grpSpPr>
+      <p:grpSpPr/>
       <p:sp>
         <p:nvSpPr>
           <p:cNvPr id="2" name="Rectangle 1"/>
@@ -6081,7 +5910,6 @@
           <a:lstStyle/>
           <a:p>
             <a:pPr algn="ctr"/>
-            <a:endParaRPr/>
           </a:p>
         </p:txBody>
       </p:sp>
@@ -6102,7 +5930,7 @@
           <a:noFill/>
         </p:spPr>
         <p:txBody>
-          <a:bodyPr wrap="square" lIns="0" tIns="0" rIns="0" bIns="0">
+          <a:bodyPr wrap="square" lIns="0" rIns="0" tIns="0" bIns="0">
             <a:spAutoFit/>
           </a:bodyPr>
           <a:lstStyle/>
@@ -6136,7 +5964,7 @@
           <a:noFill/>
         </p:spPr>
         <p:txBody>
-          <a:bodyPr wrap="square" lIns="0" tIns="0" rIns="0" bIns="0">
+          <a:bodyPr wrap="square" lIns="0" rIns="0" tIns="0" bIns="0">
             <a:spAutoFit/>
           </a:bodyPr>
           <a:lstStyle/>
@@ -6194,7 +6022,6 @@
           <a:lstStyle/>
           <a:p>
             <a:pPr algn="ctr"/>
-            <a:endParaRPr/>
           </a:p>
         </p:txBody>
       </p:sp>
@@ -6215,7 +6042,7 @@
           <a:noFill/>
         </p:spPr>
         <p:txBody>
-          <a:bodyPr wrap="square" lIns="0" tIns="0" rIns="0" bIns="0">
+          <a:bodyPr wrap="square" lIns="0" rIns="0" tIns="0" bIns="0">
             <a:spAutoFit/>
           </a:bodyPr>
           <a:lstStyle/>
@@ -6441,7 +6268,6 @@
           <a:lstStyle/>
           <a:p>
             <a:pPr algn="ctr"/>
-            <a:endParaRPr/>
           </a:p>
         </p:txBody>
       </p:sp>
@@ -6462,7 +6288,7 @@
           <a:noFill/>
         </p:spPr>
         <p:txBody>
-          <a:bodyPr wrap="square" lIns="0" tIns="0" rIns="0" bIns="0">
+          <a:bodyPr wrap="square" lIns="0" rIns="0" tIns="0" bIns="0">
             <a:spAutoFit/>
           </a:bodyPr>
           <a:lstStyle/>
@@ -6496,7 +6322,7 @@
           <a:noFill/>
         </p:spPr>
         <p:txBody>
-          <a:bodyPr wrap="square" lIns="0" tIns="0" rIns="0" bIns="0">
+          <a:bodyPr wrap="square" lIns="0" rIns="0" tIns="0" bIns="0">
             <a:spAutoFit/>
           </a:bodyPr>
           <a:lstStyle/>
@@ -6523,7 +6349,7 @@
 </file>
 
 <file path=ppt/slides/slide4.xml><?xml version="1.0" encoding="utf-8"?>
-<p:sld xmlns:a="http://schemas.openxmlformats.org/drawingml/2006/main" xmlns:r="http://schemas.openxmlformats.org/officeDocument/2006/relationships" xmlns:p="http://schemas.openxmlformats.org/presentationml/2006/main">
+<p:sld xmlns:a="http://schemas.openxmlformats.org/drawingml/2006/main" xmlns:p="http://schemas.openxmlformats.org/presentationml/2006/main" xmlns:r="http://schemas.openxmlformats.org/officeDocument/2006/relationships">
   <p:cSld>
     <p:bg>
       <p:bgPr>
@@ -6539,14 +6365,7 @@
         <p:cNvGrpSpPr/>
         <p:nvPr/>
       </p:nvGrpSpPr>
-      <p:grpSpPr>
-        <a:xfrm>
-          <a:off x="0" y="0"/>
-          <a:ext cx="0" cy="0"/>
-          <a:chOff x="0" y="0"/>
-          <a:chExt cx="0" cy="0"/>
-        </a:xfrm>
-      </p:grpSpPr>
+      <p:grpSpPr/>
       <p:sp>
         <p:nvSpPr>
           <p:cNvPr id="2" name="Rectangle 1"/>
@@ -6588,7 +6407,6 @@
           <a:lstStyle/>
           <a:p>
             <a:pPr algn="ctr"/>
-            <a:endParaRPr/>
           </a:p>
         </p:txBody>
       </p:sp>
@@ -6609,7 +6427,7 @@
           <a:noFill/>
         </p:spPr>
         <p:txBody>
-          <a:bodyPr wrap="square" lIns="0" tIns="0" rIns="0" bIns="0">
+          <a:bodyPr wrap="square" lIns="0" rIns="0" tIns="0" bIns="0">
             <a:spAutoFit/>
           </a:bodyPr>
           <a:lstStyle/>
@@ -6643,7 +6461,7 @@
           <a:noFill/>
         </p:spPr>
         <p:txBody>
-          <a:bodyPr wrap="square" lIns="0" tIns="0" rIns="0" bIns="0">
+          <a:bodyPr wrap="square" lIns="0" rIns="0" tIns="0" bIns="0">
             <a:spAutoFit/>
           </a:bodyPr>
           <a:lstStyle/>
@@ -6701,7 +6519,6 @@
           <a:lstStyle/>
           <a:p>
             <a:pPr algn="ctr"/>
-            <a:endParaRPr/>
           </a:p>
         </p:txBody>
       </p:sp>
@@ -6722,7 +6539,7 @@
           <a:noFill/>
         </p:spPr>
         <p:txBody>
-          <a:bodyPr wrap="square" lIns="0" tIns="0" rIns="0" bIns="0">
+          <a:bodyPr wrap="square" lIns="0" rIns="0" tIns="0" bIns="0">
             <a:spAutoFit/>
           </a:bodyPr>
           <a:lstStyle/>
@@ -6910,7 +6727,6 @@
           <a:lstStyle/>
           <a:p>
             <a:pPr algn="ctr"/>
-            <a:endParaRPr/>
           </a:p>
         </p:txBody>
       </p:sp>
@@ -6931,7 +6747,7 @@
           <a:noFill/>
         </p:spPr>
         <p:txBody>
-          <a:bodyPr wrap="square" lIns="0" tIns="0" rIns="0" bIns="0">
+          <a:bodyPr wrap="square" lIns="0" rIns="0" tIns="0" bIns="0">
             <a:spAutoFit/>
           </a:bodyPr>
           <a:lstStyle/>
@@ -6965,7 +6781,7 @@
           <a:noFill/>
         </p:spPr>
         <p:txBody>
-          <a:bodyPr wrap="square" lIns="0" tIns="0" rIns="0" bIns="0">
+          <a:bodyPr wrap="square" lIns="0" rIns="0" tIns="0" bIns="0">
             <a:spAutoFit/>
           </a:bodyPr>
           <a:lstStyle/>
@@ -6992,7 +6808,7 @@
 </file>
 
 <file path=ppt/slides/slide5.xml><?xml version="1.0" encoding="utf-8"?>
-<p:sld xmlns:a="http://schemas.openxmlformats.org/drawingml/2006/main" xmlns:r="http://schemas.openxmlformats.org/officeDocument/2006/relationships" xmlns:p="http://schemas.openxmlformats.org/presentationml/2006/main">
+<p:sld xmlns:a="http://schemas.openxmlformats.org/drawingml/2006/main" xmlns:p="http://schemas.openxmlformats.org/presentationml/2006/main" xmlns:r="http://schemas.openxmlformats.org/officeDocument/2006/relationships">
   <p:cSld>
     <p:bg>
       <p:bgPr>
@@ -7008,14 +6824,7 @@
         <p:cNvGrpSpPr/>
         <p:nvPr/>
       </p:nvGrpSpPr>
-      <p:grpSpPr>
-        <a:xfrm>
-          <a:off x="0" y="0"/>
-          <a:ext cx="0" cy="0"/>
-          <a:chOff x="0" y="0"/>
-          <a:chExt cx="0" cy="0"/>
-        </a:xfrm>
-      </p:grpSpPr>
+      <p:grpSpPr/>
       <p:sp>
         <p:nvSpPr>
           <p:cNvPr id="2" name="Rectangle 1"/>
@@ -7057,7 +6866,6 @@
           <a:lstStyle/>
           <a:p>
             <a:pPr algn="ctr"/>
-            <a:endParaRPr/>
           </a:p>
         </p:txBody>
       </p:sp>
@@ -7078,7 +6886,7 @@
           <a:noFill/>
         </p:spPr>
         <p:txBody>
-          <a:bodyPr wrap="square" lIns="0" tIns="0" rIns="0" bIns="0">
+          <a:bodyPr wrap="square" lIns="0" rIns="0" tIns="0" bIns="0">
             <a:spAutoFit/>
           </a:bodyPr>
           <a:lstStyle/>
@@ -7112,7 +6920,7 @@
           <a:noFill/>
         </p:spPr>
         <p:txBody>
-          <a:bodyPr wrap="square" lIns="0" tIns="0" rIns="0" bIns="0">
+          <a:bodyPr wrap="square" lIns="0" rIns="0" tIns="0" bIns="0">
             <a:spAutoFit/>
           </a:bodyPr>
           <a:lstStyle/>
@@ -7170,7 +6978,6 @@
           <a:lstStyle/>
           <a:p>
             <a:pPr algn="ctr"/>
-            <a:endParaRPr/>
           </a:p>
         </p:txBody>
       </p:sp>
@@ -7215,7 +7022,7 @@
           <a:noFill/>
         </p:spPr>
         <p:txBody>
-          <a:bodyPr wrap="square" lIns="0" tIns="0" rIns="0" bIns="0">
+          <a:bodyPr wrap="square" lIns="0" rIns="0" tIns="0" bIns="0">
             <a:spAutoFit/>
           </a:bodyPr>
           <a:lstStyle/>
@@ -7274,7 +7081,6 @@
           <a:lstStyle/>
           <a:p>
             <a:pPr algn="ctr"/>
-            <a:endParaRPr/>
           </a:p>
         </p:txBody>
       </p:sp>
@@ -7295,7 +7101,7 @@
           <a:noFill/>
         </p:spPr>
         <p:txBody>
-          <a:bodyPr wrap="square" lIns="0" tIns="0" rIns="0" bIns="0">
+          <a:bodyPr wrap="square" lIns="0" rIns="0" tIns="0" bIns="0">
             <a:spAutoFit/>
           </a:bodyPr>
           <a:lstStyle/>
@@ -7329,7 +7135,7 @@
           <a:noFill/>
         </p:spPr>
         <p:txBody>
-          <a:bodyPr wrap="square" lIns="0" tIns="0" rIns="0" bIns="0">
+          <a:bodyPr wrap="square" lIns="0" rIns="0" tIns="0" bIns="0">
             <a:spAutoFit/>
           </a:bodyPr>
           <a:lstStyle/>
@@ -7356,7 +7162,7 @@
 </file>
 
 <file path=ppt/slides/slide6.xml><?xml version="1.0" encoding="utf-8"?>
-<p:sld xmlns:a="http://schemas.openxmlformats.org/drawingml/2006/main" xmlns:r="http://schemas.openxmlformats.org/officeDocument/2006/relationships" xmlns:p="http://schemas.openxmlformats.org/presentationml/2006/main">
+<p:sld xmlns:a="http://schemas.openxmlformats.org/drawingml/2006/main" xmlns:p="http://schemas.openxmlformats.org/presentationml/2006/main" xmlns:r="http://schemas.openxmlformats.org/officeDocument/2006/relationships">
   <p:cSld>
     <p:bg>
       <p:bgPr>
@@ -7372,14 +7178,7 @@
         <p:cNvGrpSpPr/>
         <p:nvPr/>
       </p:nvGrpSpPr>
-      <p:grpSpPr>
-        <a:xfrm>
-          <a:off x="0" y="0"/>
-          <a:ext cx="0" cy="0"/>
-          <a:chOff x="0" y="0"/>
-          <a:chExt cx="0" cy="0"/>
-        </a:xfrm>
-      </p:grpSpPr>
+      <p:grpSpPr/>
       <p:sp>
         <p:nvSpPr>
           <p:cNvPr id="2" name="Rectangle 1"/>
@@ -7421,7 +7220,6 @@
           <a:lstStyle/>
           <a:p>
             <a:pPr algn="ctr"/>
-            <a:endParaRPr/>
           </a:p>
         </p:txBody>
       </p:sp>
@@ -7434,7 +7232,7 @@
         <p:spPr>
           <a:xfrm>
             <a:off x="777240" y="502920"/>
-            <a:ext cx="10637215" cy="184666"/>
+            <a:ext cx="10637215" cy="274320"/>
           </a:xfrm>
           <a:prstGeom prst="rect">
             <a:avLst/>
@@ -7442,19 +7240,19 @@
           <a:noFill/>
         </p:spPr>
         <p:txBody>
-          <a:bodyPr wrap="square" lIns="0" tIns="0" rIns="0" bIns="0">
+          <a:bodyPr wrap="square" lIns="0" rIns="0" tIns="0" bIns="0">
             <a:spAutoFit/>
           </a:bodyPr>
           <a:lstStyle/>
           <a:p>
             <a:r>
-              <a:rPr sz="1200" b="1" i="0" dirty="0">
+              <a:rPr sz="1200" b="1" i="0">
                 <a:solidFill>
                   <a:srgbClr val="4E7A00"/>
                 </a:solidFill>
                 <a:latin typeface="Calibri"/>
               </a:rPr>
-              <a:t>EXECUTION &amp; COMPLETENESS </a:t>
+              <a:t>EXECUTION &amp; COMPLETENESS · 30 PTS</a:t>
             </a:r>
           </a:p>
         </p:txBody>
@@ -7476,7 +7274,7 @@
           <a:noFill/>
         </p:spPr>
         <p:txBody>
-          <a:bodyPr wrap="square" lIns="0" tIns="0" rIns="0" bIns="0">
+          <a:bodyPr wrap="square" lIns="0" rIns="0" tIns="0" bIns="0">
             <a:spAutoFit/>
           </a:bodyPr>
           <a:lstStyle/>
@@ -7534,7 +7332,6 @@
           <a:lstStyle/>
           <a:p>
             <a:pPr algn="ctr"/>
-            <a:endParaRPr/>
           </a:p>
         </p:txBody>
       </p:sp>
@@ -7555,7 +7352,7 @@
           <a:noFill/>
         </p:spPr>
         <p:txBody>
-          <a:bodyPr wrap="square" lIns="0" tIns="0" rIns="0" bIns="0">
+          <a:bodyPr wrap="square" lIns="0" rIns="0" tIns="0" bIns="0">
             <a:spAutoFit/>
           </a:bodyPr>
           <a:lstStyle/>
@@ -7830,7 +7627,6 @@
           <a:lstStyle/>
           <a:p>
             <a:pPr algn="ctr"/>
-            <a:endParaRPr/>
           </a:p>
         </p:txBody>
       </p:sp>
@@ -7851,7 +7647,7 @@
           <a:noFill/>
         </p:spPr>
         <p:txBody>
-          <a:bodyPr wrap="square" lIns="0" tIns="0" rIns="0" bIns="0">
+          <a:bodyPr wrap="square" lIns="0" rIns="0" tIns="0" bIns="0">
             <a:spAutoFit/>
           </a:bodyPr>
           <a:lstStyle/>
@@ -7885,7 +7681,7 @@
           <a:noFill/>
         </p:spPr>
         <p:txBody>
-          <a:bodyPr wrap="square" lIns="0" tIns="0" rIns="0" bIns="0">
+          <a:bodyPr wrap="square" lIns="0" rIns="0" tIns="0" bIns="0">
             <a:spAutoFit/>
           </a:bodyPr>
           <a:lstStyle/>
@@ -7912,7 +7708,7 @@
 </file>
 
 <file path=ppt/slides/slide7.xml><?xml version="1.0" encoding="utf-8"?>
-<p:sld xmlns:a="http://schemas.openxmlformats.org/drawingml/2006/main" xmlns:r="http://schemas.openxmlformats.org/officeDocument/2006/relationships" xmlns:p="http://schemas.openxmlformats.org/presentationml/2006/main">
+<p:sld xmlns:a="http://schemas.openxmlformats.org/drawingml/2006/main" xmlns:p="http://schemas.openxmlformats.org/presentationml/2006/main" xmlns:r="http://schemas.openxmlformats.org/officeDocument/2006/relationships">
   <p:cSld>
     <p:bg>
       <p:bgPr>
@@ -7928,14 +7724,7 @@
         <p:cNvGrpSpPr/>
         <p:nvPr/>
       </p:nvGrpSpPr>
-      <p:grpSpPr>
-        <a:xfrm>
-          <a:off x="0" y="0"/>
-          <a:ext cx="0" cy="0"/>
-          <a:chOff x="0" y="0"/>
-          <a:chExt cx="0" cy="0"/>
-        </a:xfrm>
-      </p:grpSpPr>
+      <p:grpSpPr/>
       <p:sp>
         <p:nvSpPr>
           <p:cNvPr id="2" name="Rectangle 1"/>
@@ -7977,7 +7766,6 @@
           <a:lstStyle/>
           <a:p>
             <a:pPr algn="ctr"/>
-            <a:endParaRPr/>
           </a:p>
         </p:txBody>
       </p:sp>
@@ -7990,7 +7778,7 @@
         <p:spPr>
           <a:xfrm>
             <a:off x="777240" y="502920"/>
-            <a:ext cx="10637215" cy="184666"/>
+            <a:ext cx="10637215" cy="274320"/>
           </a:xfrm>
           <a:prstGeom prst="rect">
             <a:avLst/>
@@ -7998,19 +7786,19 @@
           <a:noFill/>
         </p:spPr>
         <p:txBody>
-          <a:bodyPr wrap="square" lIns="0" tIns="0" rIns="0" bIns="0">
+          <a:bodyPr wrap="square" lIns="0" rIns="0" tIns="0" bIns="0">
             <a:spAutoFit/>
           </a:bodyPr>
           <a:lstStyle/>
           <a:p>
             <a:r>
-              <a:rPr sz="1200" b="1" i="0" dirty="0">
+              <a:rPr sz="1200" b="1" i="0">
                 <a:solidFill>
                   <a:srgbClr val="4E7A00"/>
                 </a:solidFill>
                 <a:latin typeface="Calibri"/>
               </a:rPr>
-              <a:t>NVIDIA STACK</a:t>
+              <a:t>NVIDIA STACK · 30 PTS</a:t>
             </a:r>
           </a:p>
         </p:txBody>
@@ -8032,7 +7820,7 @@
           <a:noFill/>
         </p:spPr>
         <p:txBody>
-          <a:bodyPr wrap="square" lIns="0" tIns="0" rIns="0" bIns="0">
+          <a:bodyPr wrap="square" lIns="0" rIns="0" tIns="0" bIns="0">
             <a:spAutoFit/>
           </a:bodyPr>
           <a:lstStyle/>
@@ -8090,7 +7878,6 @@
           <a:lstStyle/>
           <a:p>
             <a:pPr algn="ctr"/>
-            <a:endParaRPr/>
           </a:p>
         </p:txBody>
       </p:sp>
@@ -8111,7 +7898,7 @@
           <a:noFill/>
         </p:spPr>
         <p:txBody>
-          <a:bodyPr wrap="square" lIns="0" tIns="0" rIns="0" bIns="0">
+          <a:bodyPr wrap="square" lIns="0" rIns="0" tIns="0" bIns="0">
             <a:spAutoFit/>
           </a:bodyPr>
           <a:lstStyle/>
@@ -8143,22 +7930,10 @@
         <a:graphic>
           <a:graphicData uri="http://schemas.openxmlformats.org/drawingml/2006/table">
             <a:tbl>
-              <a:tblPr/>
+              <a:tblPr firstRow="0" bandRow="0"/>
               <a:tblGrid>
-                <a:gridCol w="3931920">
-                  <a:extLst>
-                    <a:ext uri="{9D8B030D-6E8A-4147-A177-3AD203B41FA5}">
-                      <a16:colId xmlns:a16="http://schemas.microsoft.com/office/drawing/2014/main" val="20000"/>
-                    </a:ext>
-                  </a:extLst>
-                </a:gridCol>
-                <a:gridCol w="6702552">
-                  <a:extLst>
-                    <a:ext uri="{9D8B030D-6E8A-4147-A177-3AD203B41FA5}">
-                      <a16:colId xmlns:a16="http://schemas.microsoft.com/office/drawing/2014/main" val="20001"/>
-                    </a:ext>
-                  </a:extLst>
-                </a:gridCol>
+                <a:gridCol w="3931920"/>
+                <a:gridCol w="6702552"/>
               </a:tblGrid>
               <a:tr h="457200">
                 <a:tc>
@@ -8178,7 +7953,7 @@
                       </a:r>
                     </a:p>
                   </a:txBody>
-                  <a:tcPr marL="128016" marT="36576" marB="36576" anchor="ctr">
+                  <a:tcPr anchor="ctr" marL="128016" marR="91440" marT="36576" marB="36576">
                     <a:solidFill>
                       <a:srgbClr val="76B900"/>
                     </a:solidFill>
@@ -8201,17 +7976,12 @@
                       </a:r>
                     </a:p>
                   </a:txBody>
-                  <a:tcPr marL="128016" marT="36576" marB="36576" anchor="ctr">
+                  <a:tcPr anchor="ctr" marL="128016" marR="91440" marT="36576" marB="36576">
                     <a:solidFill>
                       <a:srgbClr val="76B900"/>
                     </a:solidFill>
                   </a:tcPr>
                 </a:tc>
-                <a:extLst>
-                  <a:ext uri="{0D108BD9-81ED-4DB2-BD59-A6C34878D82A}">
-                    <a16:rowId xmlns:a16="http://schemas.microsoft.com/office/drawing/2014/main" val="10000"/>
-                  </a:ext>
-                </a:extLst>
               </a:tr>
               <a:tr h="475488">
                 <a:tc>
@@ -8231,7 +8001,7 @@
                       </a:r>
                     </a:p>
                   </a:txBody>
-                  <a:tcPr marL="128016" marT="36576" marB="36576" anchor="ctr">
+                  <a:tcPr anchor="ctr" marL="128016" marR="91440" marT="36576" marB="36576">
                     <a:solidFill>
                       <a:srgbClr val="F5F7F1"/>
                     </a:solidFill>
@@ -8254,17 +8024,12 @@
                       </a:r>
                     </a:p>
                   </a:txBody>
-                  <a:tcPr marL="128016" marT="36576" marB="36576" anchor="ctr">
+                  <a:tcPr anchor="ctr" marL="128016" marR="91440" marT="36576" marB="36576">
                     <a:solidFill>
                       <a:srgbClr val="F5F7F1"/>
                     </a:solidFill>
                   </a:tcPr>
                 </a:tc>
-                <a:extLst>
-                  <a:ext uri="{0D108BD9-81ED-4DB2-BD59-A6C34878D82A}">
-                    <a16:rowId xmlns:a16="http://schemas.microsoft.com/office/drawing/2014/main" val="10001"/>
-                  </a:ext>
-                </a:extLst>
               </a:tr>
               <a:tr h="475488">
                 <a:tc>
@@ -8284,7 +8049,7 @@
                       </a:r>
                     </a:p>
                   </a:txBody>
-                  <a:tcPr marL="128016" marT="36576" marB="36576" anchor="ctr">
+                  <a:tcPr anchor="ctr" marL="128016" marR="91440" marT="36576" marB="36576">
                     <a:solidFill>
                       <a:srgbClr val="FFFFFF"/>
                     </a:solidFill>
@@ -8307,17 +8072,12 @@
                       </a:r>
                     </a:p>
                   </a:txBody>
-                  <a:tcPr marL="128016" marT="36576" marB="36576" anchor="ctr">
+                  <a:tcPr anchor="ctr" marL="128016" marR="91440" marT="36576" marB="36576">
                     <a:solidFill>
                       <a:srgbClr val="FFFFFF"/>
                     </a:solidFill>
                   </a:tcPr>
                 </a:tc>
-                <a:extLst>
-                  <a:ext uri="{0D108BD9-81ED-4DB2-BD59-A6C34878D82A}">
-                    <a16:rowId xmlns:a16="http://schemas.microsoft.com/office/drawing/2014/main" val="10002"/>
-                  </a:ext>
-                </a:extLst>
               </a:tr>
               <a:tr h="475488">
                 <a:tc>
@@ -8337,7 +8097,7 @@
                       </a:r>
                     </a:p>
                   </a:txBody>
-                  <a:tcPr marL="128016" marT="36576" marB="36576" anchor="ctr">
+                  <a:tcPr anchor="ctr" marL="128016" marR="91440" marT="36576" marB="36576">
                     <a:solidFill>
                       <a:srgbClr val="F5F7F1"/>
                     </a:solidFill>
@@ -8360,17 +8120,12 @@
                       </a:r>
                     </a:p>
                   </a:txBody>
-                  <a:tcPr marL="128016" marT="36576" marB="36576" anchor="ctr">
+                  <a:tcPr anchor="ctr" marL="128016" marR="91440" marT="36576" marB="36576">
                     <a:solidFill>
                       <a:srgbClr val="F5F7F1"/>
                     </a:solidFill>
                   </a:tcPr>
                 </a:tc>
-                <a:extLst>
-                  <a:ext uri="{0D108BD9-81ED-4DB2-BD59-A6C34878D82A}">
-                    <a16:rowId xmlns:a16="http://schemas.microsoft.com/office/drawing/2014/main" val="10003"/>
-                  </a:ext>
-                </a:extLst>
               </a:tr>
               <a:tr h="475488">
                 <a:tc>
@@ -8390,7 +8145,7 @@
                       </a:r>
                     </a:p>
                   </a:txBody>
-                  <a:tcPr marL="128016" marT="36576" marB="36576" anchor="ctr">
+                  <a:tcPr anchor="ctr" marL="128016" marR="91440" marT="36576" marB="36576">
                     <a:solidFill>
                       <a:srgbClr val="FFFFFF"/>
                     </a:solidFill>
@@ -8413,17 +8168,12 @@
                       </a:r>
                     </a:p>
                   </a:txBody>
-                  <a:tcPr marL="128016" marT="36576" marB="36576" anchor="ctr">
+                  <a:tcPr anchor="ctr" marL="128016" marR="91440" marT="36576" marB="36576">
                     <a:solidFill>
                       <a:srgbClr val="FFFFFF"/>
                     </a:solidFill>
                   </a:tcPr>
                 </a:tc>
-                <a:extLst>
-                  <a:ext uri="{0D108BD9-81ED-4DB2-BD59-A6C34878D82A}">
-                    <a16:rowId xmlns:a16="http://schemas.microsoft.com/office/drawing/2014/main" val="10004"/>
-                  </a:ext>
-                </a:extLst>
               </a:tr>
               <a:tr h="475488">
                 <a:tc>
@@ -8443,7 +8193,7 @@
                       </a:r>
                     </a:p>
                   </a:txBody>
-                  <a:tcPr marL="128016" marT="36576" marB="36576" anchor="ctr">
+                  <a:tcPr anchor="ctr" marL="128016" marR="91440" marT="36576" marB="36576">
                     <a:solidFill>
                       <a:srgbClr val="F5F7F1"/>
                     </a:solidFill>
@@ -8456,7 +8206,7 @@
                     <a:p>
                       <a:pPr algn="l"/>
                       <a:r>
-                        <a:rPr sz="1400" b="0" i="0" dirty="0">
+                        <a:rPr sz="1400" b="0" i="0">
                           <a:solidFill>
                             <a:srgbClr val="1C212E"/>
                           </a:solidFill>
@@ -8466,17 +8216,12 @@
                       </a:r>
                     </a:p>
                   </a:txBody>
-                  <a:tcPr marL="128016" marT="36576" marB="36576" anchor="ctr">
+                  <a:tcPr anchor="ctr" marL="128016" marR="91440" marT="36576" marB="36576">
                     <a:solidFill>
                       <a:srgbClr val="F5F7F1"/>
                     </a:solidFill>
                   </a:tcPr>
                 </a:tc>
-                <a:extLst>
-                  <a:ext uri="{0D108BD9-81ED-4DB2-BD59-A6C34878D82A}">
-                    <a16:rowId xmlns:a16="http://schemas.microsoft.com/office/drawing/2014/main" val="10005"/>
-                  </a:ext>
-                </a:extLst>
               </a:tr>
             </a:tbl>
           </a:graphicData>
@@ -8523,7 +8268,6 @@
           <a:lstStyle/>
           <a:p>
             <a:pPr algn="ctr"/>
-            <a:endParaRPr/>
           </a:p>
         </p:txBody>
       </p:sp>
@@ -8544,7 +8288,7 @@
           <a:noFill/>
         </p:spPr>
         <p:txBody>
-          <a:bodyPr wrap="square" lIns="0" tIns="0" rIns="0" bIns="0">
+          <a:bodyPr wrap="square" lIns="0" rIns="0" tIns="0" bIns="0">
             <a:spAutoFit/>
           </a:bodyPr>
           <a:lstStyle/>
@@ -8578,7 +8322,7 @@
           <a:noFill/>
         </p:spPr>
         <p:txBody>
-          <a:bodyPr wrap="square" lIns="0" tIns="0" rIns="0" bIns="0">
+          <a:bodyPr wrap="square" lIns="0" rIns="0" tIns="0" bIns="0">
             <a:spAutoFit/>
           </a:bodyPr>
           <a:lstStyle/>
@@ -8605,7 +8349,7 @@
 </file>
 
 <file path=ppt/slides/slide8.xml><?xml version="1.0" encoding="utf-8"?>
-<p:sld xmlns:a="http://schemas.openxmlformats.org/drawingml/2006/main" xmlns:r="http://schemas.openxmlformats.org/officeDocument/2006/relationships" xmlns:p="http://schemas.openxmlformats.org/presentationml/2006/main">
+<p:sld xmlns:a="http://schemas.openxmlformats.org/drawingml/2006/main" xmlns:p="http://schemas.openxmlformats.org/presentationml/2006/main" xmlns:r="http://schemas.openxmlformats.org/officeDocument/2006/relationships">
   <p:cSld>
     <p:bg>
       <p:bgPr>
@@ -8621,14 +8365,7 @@
         <p:cNvGrpSpPr/>
         <p:nvPr/>
       </p:nvGrpSpPr>
-      <p:grpSpPr>
-        <a:xfrm>
-          <a:off x="0" y="0"/>
-          <a:ext cx="0" cy="0"/>
-          <a:chOff x="0" y="0"/>
-          <a:chExt cx="0" cy="0"/>
-        </a:xfrm>
-      </p:grpSpPr>
+      <p:grpSpPr/>
       <p:sp>
         <p:nvSpPr>
           <p:cNvPr id="2" name="Rectangle 1"/>
@@ -8670,7 +8407,6 @@
           <a:lstStyle/>
           <a:p>
             <a:pPr algn="ctr"/>
-            <a:endParaRPr/>
           </a:p>
         </p:txBody>
       </p:sp>
@@ -8683,7 +8419,7 @@
         <p:spPr>
           <a:xfrm>
             <a:off x="777240" y="502920"/>
-            <a:ext cx="10637215" cy="184666"/>
+            <a:ext cx="10637215" cy="274320"/>
           </a:xfrm>
           <a:prstGeom prst="rect">
             <a:avLst/>
@@ -8691,19 +8427,19 @@
           <a:noFill/>
         </p:spPr>
         <p:txBody>
-          <a:bodyPr wrap="square" lIns="0" tIns="0" rIns="0" bIns="0">
+          <a:bodyPr wrap="square" lIns="0" rIns="0" tIns="0" bIns="0">
             <a:spAutoFit/>
           </a:bodyPr>
           <a:lstStyle/>
           <a:p>
             <a:r>
-              <a:rPr sz="1200" b="1" i="0" dirty="0">
+              <a:rPr sz="1200" b="1" i="0">
                 <a:solidFill>
                   <a:srgbClr val="4E7A00"/>
                 </a:solidFill>
                 <a:latin typeface="Calibri"/>
               </a:rPr>
-              <a:t>THE SPARK STORY</a:t>
+              <a:t>THE SPARK STORY · 15 PTS</a:t>
             </a:r>
           </a:p>
         </p:txBody>
@@ -8725,7 +8461,7 @@
           <a:noFill/>
         </p:spPr>
         <p:txBody>
-          <a:bodyPr wrap="square" lIns="0" tIns="0" rIns="0" bIns="0">
+          <a:bodyPr wrap="square" lIns="0" rIns="0" tIns="0" bIns="0">
             <a:spAutoFit/>
           </a:bodyPr>
           <a:lstStyle/>
@@ -8783,7 +8519,6 @@
           <a:lstStyle/>
           <a:p>
             <a:pPr algn="ctr"/>
-            <a:endParaRPr/>
           </a:p>
         </p:txBody>
       </p:sp>
@@ -8804,7 +8539,7 @@
           <a:noFill/>
         </p:spPr>
         <p:txBody>
-          <a:bodyPr wrap="square" lIns="0" tIns="0" rIns="0" bIns="0">
+          <a:bodyPr wrap="square" lIns="0" rIns="0" tIns="0" bIns="0">
             <a:spAutoFit/>
           </a:bodyPr>
           <a:lstStyle/>
@@ -8942,7 +8677,6 @@
           <a:lstStyle/>
           <a:p>
             <a:pPr algn="ctr"/>
-            <a:endParaRPr/>
           </a:p>
         </p:txBody>
       </p:sp>
@@ -8963,7 +8697,7 @@
           <a:noFill/>
         </p:spPr>
         <p:txBody>
-          <a:bodyPr wrap="square" lIns="0" tIns="0" rIns="0" bIns="0">
+          <a:bodyPr wrap="square" lIns="0" rIns="0" tIns="0" bIns="0">
             <a:spAutoFit/>
           </a:bodyPr>
           <a:lstStyle/>
@@ -8997,7 +8731,7 @@
           <a:noFill/>
         </p:spPr>
         <p:txBody>
-          <a:bodyPr wrap="square" lIns="0" tIns="0" rIns="0" bIns="0">
+          <a:bodyPr wrap="square" lIns="0" rIns="0" tIns="0" bIns="0">
             <a:spAutoFit/>
           </a:bodyPr>
           <a:lstStyle/>
@@ -9024,7 +8758,7 @@
 </file>
 
 <file path=ppt/slides/slide9.xml><?xml version="1.0" encoding="utf-8"?>
-<p:sld xmlns:a="http://schemas.openxmlformats.org/drawingml/2006/main" xmlns:r="http://schemas.openxmlformats.org/officeDocument/2006/relationships" xmlns:p="http://schemas.openxmlformats.org/presentationml/2006/main">
+<p:sld xmlns:a="http://schemas.openxmlformats.org/drawingml/2006/main" xmlns:p="http://schemas.openxmlformats.org/presentationml/2006/main" xmlns:r="http://schemas.openxmlformats.org/officeDocument/2006/relationships">
   <p:cSld>
     <p:bg>
       <p:bgPr>
@@ -9040,14 +8774,7 @@
         <p:cNvGrpSpPr/>
         <p:nvPr/>
       </p:nvGrpSpPr>
-      <p:grpSpPr>
-        <a:xfrm>
-          <a:off x="0" y="0"/>
-          <a:ext cx="0" cy="0"/>
-          <a:chOff x="0" y="0"/>
-          <a:chExt cx="0" cy="0"/>
-        </a:xfrm>
-      </p:grpSpPr>
+      <p:grpSpPr/>
       <p:sp>
         <p:nvSpPr>
           <p:cNvPr id="2" name="Rectangle 1"/>
@@ -9089,7 +8816,6 @@
           <a:lstStyle/>
           <a:p>
             <a:pPr algn="ctr"/>
-            <a:endParaRPr/>
           </a:p>
         </p:txBody>
       </p:sp>
@@ -9102,7 +8828,7 @@
         <p:spPr>
           <a:xfrm>
             <a:off x="777240" y="502920"/>
-            <a:ext cx="10637215" cy="184666"/>
+            <a:ext cx="10637215" cy="274320"/>
           </a:xfrm>
           <a:prstGeom prst="rect">
             <a:avLst/>
@@ -9110,19 +8836,19 @@
           <a:noFill/>
         </p:spPr>
         <p:txBody>
-          <a:bodyPr wrap="square" lIns="0" tIns="0" rIns="0" bIns="0">
+          <a:bodyPr wrap="square" lIns="0" rIns="0" tIns="0" bIns="0">
             <a:spAutoFit/>
           </a:bodyPr>
           <a:lstStyle/>
           <a:p>
             <a:r>
-              <a:rPr sz="1200" b="1" i="0" dirty="0">
+              <a:rPr sz="1200" b="1" i="0">
                 <a:solidFill>
                   <a:srgbClr val="4E7A00"/>
                 </a:solidFill>
                 <a:latin typeface="Calibri"/>
               </a:rPr>
-              <a:t>VALUE &amp; IMPACT </a:t>
+              <a:t>VALUE &amp; IMPACT · 20 PTS</a:t>
             </a:r>
           </a:p>
         </p:txBody>
@@ -9144,7 +8870,7 @@
           <a:noFill/>
         </p:spPr>
         <p:txBody>
-          <a:bodyPr wrap="square" lIns="0" tIns="0" rIns="0" bIns="0">
+          <a:bodyPr wrap="square" lIns="0" rIns="0" tIns="0" bIns="0">
             <a:spAutoFit/>
           </a:bodyPr>
           <a:lstStyle/>
@@ -9202,7 +8928,6 @@
           <a:lstStyle/>
           <a:p>
             <a:pPr algn="ctr"/>
-            <a:endParaRPr/>
           </a:p>
         </p:txBody>
       </p:sp>
@@ -9223,7 +8948,7 @@
           <a:noFill/>
         </p:spPr>
         <p:txBody>
-          <a:bodyPr wrap="square" lIns="0" tIns="0" rIns="0" bIns="0">
+          <a:bodyPr wrap="square" lIns="0" rIns="0" tIns="0" bIns="0">
             <a:spAutoFit/>
           </a:bodyPr>
           <a:lstStyle/>
@@ -9315,7 +9040,6 @@
           <a:lstStyle/>
           <a:p>
             <a:pPr algn="ctr"/>
-            <a:endParaRPr/>
           </a:p>
         </p:txBody>
       </p:sp>
@@ -9360,7 +9084,6 @@
           <a:lstStyle/>
           <a:p>
             <a:pPr algn="ctr"/>
-            <a:endParaRPr/>
           </a:p>
         </p:txBody>
       </p:sp>
@@ -9381,7 +9104,7 @@
           <a:noFill/>
         </p:spPr>
         <p:txBody>
-          <a:bodyPr wrap="square" lIns="0" tIns="0" rIns="0" bIns="0">
+          <a:bodyPr wrap="square" lIns="0" rIns="0" tIns="0" bIns="0">
             <a:spAutoFit/>
           </a:bodyPr>
           <a:lstStyle/>
@@ -9407,7 +9130,16 @@
                 </a:solidFill>
                 <a:latin typeface="Calibri"/>
               </a:rPr>
-              <a:t>      strong smell of cannabis · hands in pockets · 2-yr officer · night</a:t>
+              <a:t>      </a:t>
+            </a:r>
+            <a:r>
+              <a:rPr sz="1400" b="0" i="0">
+                <a:solidFill>
+                  <a:srgbClr val="1C212E"/>
+                </a:solidFill>
+                <a:latin typeface="Calibri"/>
+              </a:rPr>
+              <a:t>strong smell of cannabis · hands in pockets · 2-yr officer · night</a:t>
             </a:r>
           </a:p>
           <a:p>
@@ -9432,7 +9164,16 @@
                 </a:solidFill>
                 <a:latin typeface="Calibri"/>
               </a:rPr>
-              <a:t>      s.23(2) Misuse of Drugs Act 1971 — reasonable grounds to search</a:t>
+              <a:t>      </a:t>
+            </a:r>
+            <a:r>
+              <a:rPr sz="1400" b="0" i="0">
+                <a:solidFill>
+                  <a:srgbClr val="1C212E"/>
+                </a:solidFill>
+                <a:latin typeface="Calibri"/>
+              </a:rPr>
+              <a:t>s.23(2) Misuse of Drugs Act 1971 — reasonable grounds to search</a:t>
             </a:r>
           </a:p>
           <a:p>
@@ -9457,7 +9198,16 @@
                 </a:solidFill>
                 <a:latin typeface="Calibri"/>
               </a:rPr>
-              <a:t>      all GOWISELY elements (PACE Code A 3.8)</a:t>
+              <a:t>      </a:t>
+            </a:r>
+            <a:r>
+              <a:rPr sz="1400" b="0" i="0">
+                <a:solidFill>
+                  <a:srgbClr val="1C212E"/>
+                </a:solidFill>
+                <a:latin typeface="Calibri"/>
+              </a:rPr>
+              <a:t>all GOWISELY elements (PACE Code A 3.8)</a:t>
             </a:r>
           </a:p>
           <a:p>
@@ -9482,7 +9232,16 @@
                 </a:solidFill>
                 <a:latin typeface="Calibri"/>
               </a:rPr>
-              <a:t>      street search, not arrest — Code C custody rights not yet engaged</a:t>
+              <a:t>      </a:t>
+            </a:r>
+            <a:r>
+              <a:rPr sz="1400" b="0" i="0">
+                <a:solidFill>
+                  <a:srgbClr val="1C212E"/>
+                </a:solidFill>
+                <a:latin typeface="Calibri"/>
+              </a:rPr>
+              <a:t>street search, not arrest — Code C custody rights not yet engaged</a:t>
             </a:r>
           </a:p>
           <a:p>
@@ -9507,7 +9266,16 @@
                 </a:solidFill>
                 <a:latin typeface="Calibri"/>
               </a:rPr>
-              <a:t>      answer “why am I stopped?” directly; speak slowly</a:t>
+              <a:t>      </a:t>
+            </a:r>
+            <a:r>
+              <a:rPr sz="1400" b="0" i="0">
+                <a:solidFill>
+                  <a:srgbClr val="1C212E"/>
+                </a:solidFill>
+                <a:latin typeface="Calibri"/>
+              </a:rPr>
+              <a:t>answer “why am I stopped?” directly; speak slowly</a:t>
             </a:r>
           </a:p>
         </p:txBody>
@@ -9529,7 +9297,7 @@
           <a:noFill/>
         </p:spPr>
         <p:txBody>
-          <a:bodyPr wrap="square" lIns="0" tIns="0" rIns="0" bIns="0">
+          <a:bodyPr wrap="square" lIns="0" rIns="0" tIns="0" bIns="0">
             <a:spAutoFit/>
           </a:bodyPr>
           <a:lstStyle/>
@@ -9563,7 +9331,7 @@
           <a:noFill/>
         </p:spPr>
         <p:txBody>
-          <a:bodyPr wrap="square" lIns="0" tIns="0" rIns="0" bIns="0">
+          <a:bodyPr wrap="square" lIns="0" rIns="0" tIns="0" bIns="0">
             <a:spAutoFit/>
           </a:bodyPr>
           <a:lstStyle/>
@@ -9671,7 +9439,6 @@
           <a:lstStyle/>
           <a:p>
             <a:pPr algn="ctr"/>
-            <a:endParaRPr/>
           </a:p>
         </p:txBody>
       </p:sp>
@@ -9692,7 +9459,7 @@
           <a:noFill/>
         </p:spPr>
         <p:txBody>
-          <a:bodyPr wrap="square" lIns="0" tIns="0" rIns="0" bIns="0">
+          <a:bodyPr wrap="square" lIns="0" rIns="0" tIns="0" bIns="0">
             <a:spAutoFit/>
           </a:bodyPr>
           <a:lstStyle/>
@@ -9726,7 +9493,7 @@
           <a:noFill/>
         </p:spPr>
         <p:txBody>
-          <a:bodyPr wrap="square" lIns="0" tIns="0" rIns="0" bIns="0">
+          <a:bodyPr wrap="square" lIns="0" rIns="0" tIns="0" bIns="0">
             <a:spAutoFit/>
           </a:bodyPr>
           <a:lstStyle/>
